--- a/assets/files/26.04.06.세미나.pptx
+++ b/assets/files/26.04.06.세미나.pptx
@@ -5,7 +5,7 @@
     <p:sldMasterId id="2147483648" r:id="rId1"/>
   </p:sldMasterIdLst>
   <p:notesMasterIdLst>
-    <p:notesMasterId r:id="rId8"/>
+    <p:notesMasterId r:id="rId7"/>
   </p:notesMasterIdLst>
   <p:sldIdLst>
     <p:sldId id="579" r:id="rId2"/>
@@ -13,7 +13,6 @@
     <p:sldId id="631" r:id="rId4"/>
     <p:sldId id="629" r:id="rId5"/>
     <p:sldId id="632" r:id="rId6"/>
-    <p:sldId id="630" r:id="rId7"/>
   </p:sldIdLst>
   <p:sldSz cx="12192000" cy="6858000"/>
   <p:notesSz cx="7099300" cy="10234613"/>
@@ -251,18 +250,10 @@
       <p15:sldGuideLst xmlns:p15="http://schemas.microsoft.com/office/powerpoint/2012/main"/>
     </p:ext>
     <p:ext uri="http://customooxmlschemas.google.com/">
-      <go:slidesCustomData xmlns="" xmlns:mc="http://schemas.openxmlformats.org/markup-compatibility/2006" xmlns:mv="urn:schemas-microsoft-com:mac:vml" xmlns:c="http://schemas.openxmlformats.org/drawingml/2006/chart" xmlns:dgm="http://schemas.openxmlformats.org/drawingml/2006/diagram" xmlns:o="urn:schemas-microsoft-com:office:office" xmlns:v="urn:schemas-microsoft-com:vml" xmlns:pvml="urn:schemas-microsoft-com:office:powerpoint" xmlns:com="http://schemas.openxmlformats.org/drawingml/2006/compatibility" xmlns:p14="http://schemas.microsoft.com/office/powerpoint/2010/main" xmlns:p15="http://schemas.microsoft.com/office/powerpoint/2012/main" xmlns:ahyp="http://schemas.microsoft.com/office/drawing/2018/hyperlinkcolor" xmlns:go="http://customooxmlschemas.google.com/" r:id="rId119" roundtripDataSignature="AMtx7mi60wwQBXdufn43yw7rgc2Btalb6Q=="/>
+      <go:slidesCustomData xmlns:go="http://customooxmlschemas.google.com/" xmlns:ahyp="http://schemas.microsoft.com/office/drawing/2018/hyperlinkcolor" xmlns:p15="http://schemas.microsoft.com/office/powerpoint/2012/main" xmlns:p14="http://schemas.microsoft.com/office/powerpoint/2010/main" xmlns:com="http://schemas.openxmlformats.org/drawingml/2006/compatibility" xmlns:pvml="urn:schemas-microsoft-com:office:powerpoint" xmlns:v="urn:schemas-microsoft-com:vml" xmlns:o="urn:schemas-microsoft-com:office:office" xmlns:dgm="http://schemas.openxmlformats.org/drawingml/2006/diagram" xmlns:c="http://schemas.openxmlformats.org/drawingml/2006/chart" xmlns:mv="urn:schemas-microsoft-com:mac:vml" xmlns:mc="http://schemas.openxmlformats.org/markup-compatibility/2006" xmlns="" r:id="rId119" roundtripDataSignature="AMtx7mi60wwQBXdufn43yw7rgc2Btalb6Q=="/>
     </p:ext>
   </p:extLst>
 </p:presentation>
-</file>
-
-<file path=ppt/revisionInfo.xml><?xml version="1.0" encoding="utf-8"?>
-<p1510:revInfo xmlns:a="http://schemas.openxmlformats.org/drawingml/2006/main" xmlns:r="http://schemas.openxmlformats.org/officeDocument/2006/relationships" xmlns:p1510="http://schemas.microsoft.com/office/powerpoint/2015/10/main">
-  <p1510:revLst>
-    <p1510:client id="{468A9198-AFD3-476F-9B6F-68EB635D4E8F}" v="136" dt="2026-04-06T06:35:34.148"/>
-  </p1510:revLst>
-</p1510:revInfo>
 </file>
 
 <file path=ppt/changesInfos/changesInfo1.xml><?xml version="1.0" encoding="utf-8"?>
@@ -270,955 +261,15 @@
   <pc:docChgLst>
     <pc:chgData name="성우 최" userId="b39b9c6800b01a47" providerId="LiveId" clId="{86918D44-C542-442D-8291-F46EC03904AF}"/>
     <pc:docChg chg="undo custSel addSld delSld modSld">
-      <pc:chgData name="성우 최" userId="b39b9c6800b01a47" providerId="LiveId" clId="{86918D44-C542-442D-8291-F46EC03904AF}" dt="2026-04-06T06:35:38.346" v="822" actId="207"/>
+      <pc:chgData name="성우 최" userId="b39b9c6800b01a47" providerId="LiveId" clId="{86918D44-C542-442D-8291-F46EC03904AF}" dt="2026-05-16T15:49:00.960" v="823" actId="47"/>
       <pc:docMkLst>
         <pc:docMk/>
       </pc:docMkLst>
-      <pc:sldChg chg="addSp delSp modSp mod">
-        <pc:chgData name="성우 최" userId="b39b9c6800b01a47" providerId="LiveId" clId="{86918D44-C542-442D-8291-F46EC03904AF}" dt="2026-04-06T04:06:49.439" v="623" actId="478"/>
-        <pc:sldMkLst>
-          <pc:docMk/>
-          <pc:sldMk cId="999144126" sldId="629"/>
-        </pc:sldMkLst>
-        <pc:spChg chg="mod">
-          <ac:chgData name="성우 최" userId="b39b9c6800b01a47" providerId="LiveId" clId="{86918D44-C542-442D-8291-F46EC03904AF}" dt="2026-04-06T03:18:31.385" v="325" actId="20577"/>
-          <ac:spMkLst>
-            <pc:docMk/>
-            <pc:sldMk cId="999144126" sldId="629"/>
-            <ac:spMk id="2" creationId="{B1B8F2F5-C363-D9A1-112C-46A08732B6CF}"/>
-          </ac:spMkLst>
-        </pc:spChg>
-        <pc:spChg chg="add del mod">
-          <ac:chgData name="성우 최" userId="b39b9c6800b01a47" providerId="LiveId" clId="{86918D44-C542-442D-8291-F46EC03904AF}" dt="2026-04-06T04:06:49.439" v="623" actId="478"/>
-          <ac:spMkLst>
-            <pc:docMk/>
-            <pc:sldMk cId="999144126" sldId="629"/>
-            <ac:spMk id="3" creationId="{1A9CB0C5-9F56-34D0-70DB-AE3C207C383C}"/>
-          </ac:spMkLst>
-        </pc:spChg>
-        <pc:spChg chg="add mod">
-          <ac:chgData name="성우 최" userId="b39b9c6800b01a47" providerId="LiveId" clId="{86918D44-C542-442D-8291-F46EC03904AF}" dt="2026-04-06T03:24:10.993" v="473" actId="1076"/>
-          <ac:spMkLst>
-            <pc:docMk/>
-            <pc:sldMk cId="999144126" sldId="629"/>
-            <ac:spMk id="13" creationId="{7D5C5E0A-D34E-9A63-696D-E1906F89C8D6}"/>
-          </ac:spMkLst>
-        </pc:spChg>
-        <pc:spChg chg="add mod">
-          <ac:chgData name="성우 최" userId="b39b9c6800b01a47" providerId="LiveId" clId="{86918D44-C542-442D-8291-F46EC03904AF}" dt="2026-04-06T03:26:07.644" v="479" actId="1076"/>
-          <ac:spMkLst>
-            <pc:docMk/>
-            <pc:sldMk cId="999144126" sldId="629"/>
-            <ac:spMk id="14" creationId="{1192C6DA-5170-EF89-19EA-129C4204EEC8}"/>
-          </ac:spMkLst>
-        </pc:spChg>
-        <pc:spChg chg="add mod">
-          <ac:chgData name="성우 최" userId="b39b9c6800b01a47" providerId="LiveId" clId="{86918D44-C542-442D-8291-F46EC03904AF}" dt="2026-04-06T03:30:30.291" v="497" actId="1076"/>
-          <ac:spMkLst>
-            <pc:docMk/>
-            <pc:sldMk cId="999144126" sldId="629"/>
-            <ac:spMk id="22" creationId="{E58A7755-64DF-A3A2-4675-635DE19B5398}"/>
-          </ac:spMkLst>
-        </pc:spChg>
-        <pc:spChg chg="add mod">
-          <ac:chgData name="성우 최" userId="b39b9c6800b01a47" providerId="LiveId" clId="{86918D44-C542-442D-8291-F46EC03904AF}" dt="2026-04-06T03:32:47.336" v="560" actId="1076"/>
-          <ac:spMkLst>
-            <pc:docMk/>
-            <pc:sldMk cId="999144126" sldId="629"/>
-            <ac:spMk id="23" creationId="{5A4DA8C0-A4FA-3C98-2205-693FE0A1ADFD}"/>
-          </ac:spMkLst>
-        </pc:spChg>
-        <pc:spChg chg="add mod">
-          <ac:chgData name="성우 최" userId="b39b9c6800b01a47" providerId="LiveId" clId="{86918D44-C542-442D-8291-F46EC03904AF}" dt="2026-04-06T03:32:27.122" v="556" actId="1076"/>
-          <ac:spMkLst>
-            <pc:docMk/>
-            <pc:sldMk cId="999144126" sldId="629"/>
-            <ac:spMk id="28" creationId="{FDA118E8-2EE3-750D-CEA2-E482C444E47E}"/>
-          </ac:spMkLst>
-        </pc:spChg>
-        <pc:spChg chg="add mod">
-          <ac:chgData name="성우 최" userId="b39b9c6800b01a47" providerId="LiveId" clId="{86918D44-C542-442D-8291-F46EC03904AF}" dt="2026-04-06T03:32:35.001" v="558" actId="1076"/>
-          <ac:spMkLst>
-            <pc:docMk/>
-            <pc:sldMk cId="999144126" sldId="629"/>
-            <ac:spMk id="29" creationId="{EEDFE1C4-9299-E338-0792-1A1DD89519EF}"/>
-          </ac:spMkLst>
-        </pc:spChg>
-        <pc:spChg chg="add mod">
-          <ac:chgData name="성우 최" userId="b39b9c6800b01a47" providerId="LiveId" clId="{86918D44-C542-442D-8291-F46EC03904AF}" dt="2026-04-06T03:35:05.321" v="580" actId="1076"/>
-          <ac:spMkLst>
-            <pc:docMk/>
-            <pc:sldMk cId="999144126" sldId="629"/>
-            <ac:spMk id="38" creationId="{6E617F61-15FD-825E-9E47-803690E2F54E}"/>
-          </ac:spMkLst>
-        </pc:spChg>
-        <pc:spChg chg="add mod">
-          <ac:chgData name="성우 최" userId="b39b9c6800b01a47" providerId="LiveId" clId="{86918D44-C542-442D-8291-F46EC03904AF}" dt="2026-04-06T03:35:02.181" v="579" actId="20577"/>
-          <ac:spMkLst>
-            <pc:docMk/>
-            <pc:sldMk cId="999144126" sldId="629"/>
-            <ac:spMk id="39" creationId="{598A437B-7098-4018-2F62-0C6646DCDB1E}"/>
-          </ac:spMkLst>
-        </pc:spChg>
-        <pc:spChg chg="add mod">
-          <ac:chgData name="성우 최" userId="b39b9c6800b01a47" providerId="LiveId" clId="{86918D44-C542-442D-8291-F46EC03904AF}" dt="2026-04-06T03:35:16.130" v="582" actId="1076"/>
-          <ac:spMkLst>
-            <pc:docMk/>
-            <pc:sldMk cId="999144126" sldId="629"/>
-            <ac:spMk id="40" creationId="{6678F5A0-DAD5-DCF9-232A-2F8CE8FA3DE3}"/>
-          </ac:spMkLst>
-        </pc:spChg>
-        <pc:spChg chg="add mod">
-          <ac:chgData name="성우 최" userId="b39b9c6800b01a47" providerId="LiveId" clId="{86918D44-C542-442D-8291-F46EC03904AF}" dt="2026-04-06T03:35:26.748" v="584" actId="1076"/>
-          <ac:spMkLst>
-            <pc:docMk/>
-            <pc:sldMk cId="999144126" sldId="629"/>
-            <ac:spMk id="41" creationId="{BAF37B4A-F513-7E95-2F4A-796230077649}"/>
-          </ac:spMkLst>
-        </pc:spChg>
-        <pc:spChg chg="add mod">
-          <ac:chgData name="성우 최" userId="b39b9c6800b01a47" providerId="LiveId" clId="{86918D44-C542-442D-8291-F46EC03904AF}" dt="2026-04-06T03:36:37.510" v="599" actId="207"/>
-          <ac:spMkLst>
-            <pc:docMk/>
-            <pc:sldMk cId="999144126" sldId="629"/>
-            <ac:spMk id="44" creationId="{6844FB12-864E-39B4-BAD2-458501F406A8}"/>
-          </ac:spMkLst>
-        </pc:spChg>
-        <pc:cxnChg chg="add del mod">
-          <ac:chgData name="성우 최" userId="b39b9c6800b01a47" providerId="LiveId" clId="{86918D44-C542-442D-8291-F46EC03904AF}" dt="2026-04-06T03:23:08.505" v="446" actId="11529"/>
-          <ac:cxnSpMkLst>
-            <pc:docMk/>
-            <pc:sldMk cId="999144126" sldId="629"/>
-            <ac:cxnSpMk id="5" creationId="{49906760-5C9A-3B45-6C26-481E30089EB5}"/>
-          </ac:cxnSpMkLst>
-        </pc:cxnChg>
-        <pc:cxnChg chg="add del mod">
-          <ac:chgData name="성우 최" userId="b39b9c6800b01a47" providerId="LiveId" clId="{86918D44-C542-442D-8291-F46EC03904AF}" dt="2026-04-06T03:23:08.083" v="445" actId="11529"/>
-          <ac:cxnSpMkLst>
-            <pc:docMk/>
-            <pc:sldMk cId="999144126" sldId="629"/>
-            <ac:cxnSpMk id="8" creationId="{FE1B1109-D1E8-5649-47E8-378080BA2993}"/>
-          </ac:cxnSpMkLst>
-        </pc:cxnChg>
-        <pc:cxnChg chg="add">
-          <ac:chgData name="성우 최" userId="b39b9c6800b01a47" providerId="LiveId" clId="{86918D44-C542-442D-8291-F46EC03904AF}" dt="2026-04-06T03:23:12.883" v="447" actId="11529"/>
-          <ac:cxnSpMkLst>
-            <pc:docMk/>
-            <pc:sldMk cId="999144126" sldId="629"/>
-            <ac:cxnSpMk id="10" creationId="{89AE1832-0A27-11A3-AF2F-2CA342B96531}"/>
-          </ac:cxnSpMkLst>
-        </pc:cxnChg>
-        <pc:cxnChg chg="add">
-          <ac:chgData name="성우 최" userId="b39b9c6800b01a47" providerId="LiveId" clId="{86918D44-C542-442D-8291-F46EC03904AF}" dt="2026-04-06T03:23:18.473" v="448" actId="11529"/>
-          <ac:cxnSpMkLst>
-            <pc:docMk/>
-            <pc:sldMk cId="999144126" sldId="629"/>
-            <ac:cxnSpMk id="12" creationId="{72F5E434-7B8D-10A6-6F4A-626D5C8E3E51}"/>
-          </ac:cxnSpMkLst>
-        </pc:cxnChg>
-        <pc:cxnChg chg="add del mod">
-          <ac:chgData name="성우 최" userId="b39b9c6800b01a47" providerId="LiveId" clId="{86918D44-C542-442D-8291-F46EC03904AF}" dt="2026-04-06T03:25:56.665" v="478" actId="478"/>
-          <ac:cxnSpMkLst>
-            <pc:docMk/>
-            <pc:sldMk cId="999144126" sldId="629"/>
-            <ac:cxnSpMk id="16" creationId="{58355FAC-4717-F15B-AEA4-992118F76278}"/>
-          </ac:cxnSpMkLst>
-        </pc:cxnChg>
-        <pc:cxnChg chg="add">
-          <ac:chgData name="성우 최" userId="b39b9c6800b01a47" providerId="LiveId" clId="{86918D44-C542-442D-8291-F46EC03904AF}" dt="2026-04-06T03:27:13.992" v="480" actId="11529"/>
-          <ac:cxnSpMkLst>
-            <pc:docMk/>
-            <pc:sldMk cId="999144126" sldId="629"/>
-            <ac:cxnSpMk id="19" creationId="{5DB9234F-F3FE-09E9-644F-5E4A2D58055B}"/>
-          </ac:cxnSpMkLst>
-        </pc:cxnChg>
-        <pc:cxnChg chg="add mod">
-          <ac:chgData name="성우 최" userId="b39b9c6800b01a47" providerId="LiveId" clId="{86918D44-C542-442D-8291-F46EC03904AF}" dt="2026-04-06T03:32:51.959" v="561" actId="1076"/>
-          <ac:cxnSpMkLst>
-            <pc:docMk/>
-            <pc:sldMk cId="999144126" sldId="629"/>
-            <ac:cxnSpMk id="21" creationId="{74EECB0A-CDA5-27ED-DA9A-9626B0E61591}"/>
-          </ac:cxnSpMkLst>
-        </pc:cxnChg>
-        <pc:cxnChg chg="add">
-          <ac:chgData name="성우 최" userId="b39b9c6800b01a47" providerId="LiveId" clId="{86918D44-C542-442D-8291-F46EC03904AF}" dt="2026-04-06T03:31:24.411" v="512" actId="11529"/>
-          <ac:cxnSpMkLst>
-            <pc:docMk/>
-            <pc:sldMk cId="999144126" sldId="629"/>
-            <ac:cxnSpMk id="25" creationId="{A18D3D12-3BBE-BE2A-B12B-1AE06009AF9B}"/>
-          </ac:cxnSpMkLst>
-        </pc:cxnChg>
-        <pc:cxnChg chg="add mod">
-          <ac:chgData name="성우 최" userId="b39b9c6800b01a47" providerId="LiveId" clId="{86918D44-C542-442D-8291-F46EC03904AF}" dt="2026-04-06T03:32:38.825" v="559" actId="1076"/>
-          <ac:cxnSpMkLst>
-            <pc:docMk/>
-            <pc:sldMk cId="999144126" sldId="629"/>
-            <ac:cxnSpMk id="27" creationId="{D7AC2AC2-8230-BDC2-1648-AEFF33A423E2}"/>
-          </ac:cxnSpMkLst>
-        </pc:cxnChg>
-        <pc:cxnChg chg="add del mod">
-          <ac:chgData name="성우 최" userId="b39b9c6800b01a47" providerId="LiveId" clId="{86918D44-C542-442D-8291-F46EC03904AF}" dt="2026-04-06T03:33:50.072" v="567" actId="478"/>
-          <ac:cxnSpMkLst>
-            <pc:docMk/>
-            <pc:sldMk cId="999144126" sldId="629"/>
-            <ac:cxnSpMk id="31" creationId="{5971DD82-03A8-9CDB-DB1A-5D8874B565DA}"/>
-          </ac:cxnSpMkLst>
-        </pc:cxnChg>
-        <pc:cxnChg chg="add del">
-          <ac:chgData name="성우 최" userId="b39b9c6800b01a47" providerId="LiveId" clId="{86918D44-C542-442D-8291-F46EC03904AF}" dt="2026-04-06T03:34:05.001" v="569" actId="11529"/>
-          <ac:cxnSpMkLst>
-            <pc:docMk/>
-            <pc:sldMk cId="999144126" sldId="629"/>
-            <ac:cxnSpMk id="37" creationId="{F20E15D6-AD0D-3A7B-A64A-529E5AB30E2A}"/>
-          </ac:cxnSpMkLst>
-        </pc:cxnChg>
-        <pc:cxnChg chg="add mod">
-          <ac:chgData name="성우 최" userId="b39b9c6800b01a47" providerId="LiveId" clId="{86918D44-C542-442D-8291-F46EC03904AF}" dt="2026-04-06T03:36:19.615" v="587" actId="1582"/>
-          <ac:cxnSpMkLst>
-            <pc:docMk/>
-            <pc:sldMk cId="999144126" sldId="629"/>
-            <ac:cxnSpMk id="43" creationId="{9CF41D80-E1C9-5B4E-BFA8-2906C1356789}"/>
-          </ac:cxnSpMkLst>
-        </pc:cxnChg>
-      </pc:sldChg>
-      <pc:sldChg chg="delSp modSp mod">
-        <pc:chgData name="성우 최" userId="b39b9c6800b01a47" providerId="LiveId" clId="{86918D44-C542-442D-8291-F46EC03904AF}" dt="2026-04-06T04:03:28.290" v="620" actId="478"/>
+      <pc:sldChg chg="delSp modSp del mod">
+        <pc:chgData name="성우 최" userId="b39b9c6800b01a47" providerId="LiveId" clId="{86918D44-C542-442D-8291-F46EC03904AF}" dt="2026-05-16T15:49:00.960" v="823" actId="47"/>
         <pc:sldMkLst>
           <pc:docMk/>
           <pc:sldMk cId="3715221785" sldId="630"/>
-        </pc:sldMkLst>
-        <pc:spChg chg="mod">
-          <ac:chgData name="성우 최" userId="b39b9c6800b01a47" providerId="LiveId" clId="{86918D44-C542-442D-8291-F46EC03904AF}" dt="2026-04-06T04:03:27.533" v="619" actId="20577"/>
-          <ac:spMkLst>
-            <pc:docMk/>
-            <pc:sldMk cId="3715221785" sldId="630"/>
-            <ac:spMk id="2" creationId="{2EA4ABAC-17A3-0E58-7AB3-5186BFD203BF}"/>
-          </ac:spMkLst>
-        </pc:spChg>
-        <pc:spChg chg="del">
-          <ac:chgData name="성우 최" userId="b39b9c6800b01a47" providerId="LiveId" clId="{86918D44-C542-442D-8291-F46EC03904AF}" dt="2026-04-06T04:03:28.290" v="620" actId="478"/>
-          <ac:spMkLst>
-            <pc:docMk/>
-            <pc:sldMk cId="3715221785" sldId="630"/>
-            <ac:spMk id="6" creationId="{52F593C2-2417-8DC1-D7EE-D9FBEF7A2E5A}"/>
-          </ac:spMkLst>
-        </pc:spChg>
-      </pc:sldChg>
-      <pc:sldChg chg="addSp delSp modSp mod">
-        <pc:chgData name="성우 최" userId="b39b9c6800b01a47" providerId="LiveId" clId="{86918D44-C542-442D-8291-F46EC03904AF}" dt="2026-04-06T03:20:23.261" v="427" actId="20577"/>
-        <pc:sldMkLst>
-          <pc:docMk/>
-          <pc:sldMk cId="732373036" sldId="631"/>
-        </pc:sldMkLst>
-        <pc:spChg chg="add mod">
-          <ac:chgData name="성우 최" userId="b39b9c6800b01a47" providerId="LiveId" clId="{86918D44-C542-442D-8291-F46EC03904AF}" dt="2026-04-06T03:17:37.144" v="272" actId="14100"/>
-          <ac:spMkLst>
-            <pc:docMk/>
-            <pc:sldMk cId="732373036" sldId="631"/>
-            <ac:spMk id="18" creationId="{D8AFC0A4-6F51-4E3B-26DC-D7D5C8C71DCB}"/>
-          </ac:spMkLst>
-        </pc:spChg>
-        <pc:spChg chg="add mod">
-          <ac:chgData name="성우 최" userId="b39b9c6800b01a47" providerId="LiveId" clId="{86918D44-C542-442D-8291-F46EC03904AF}" dt="2026-04-06T03:18:55.695" v="346" actId="207"/>
-          <ac:spMkLst>
-            <pc:docMk/>
-            <pc:sldMk cId="732373036" sldId="631"/>
-            <ac:spMk id="19" creationId="{1BD8C09A-73E1-1C16-24FE-82A477689F3C}"/>
-          </ac:spMkLst>
-        </pc:spChg>
-        <pc:spChg chg="add mod">
-          <ac:chgData name="성우 최" userId="b39b9c6800b01a47" providerId="LiveId" clId="{86918D44-C542-442D-8291-F46EC03904AF}" dt="2026-04-06T03:19:34.094" v="408" actId="207"/>
-          <ac:spMkLst>
-            <pc:docMk/>
-            <pc:sldMk cId="732373036" sldId="631"/>
-            <ac:spMk id="20" creationId="{7C74AE0E-AA86-0EBD-3475-7159A71A0CBD}"/>
-          </ac:spMkLst>
-        </pc:spChg>
-        <pc:spChg chg="del">
-          <ac:chgData name="성우 최" userId="b39b9c6800b01a47" providerId="LiveId" clId="{86918D44-C542-442D-8291-F46EC03904AF}" dt="2026-04-06T02:59:06.609" v="14" actId="478"/>
-          <ac:spMkLst>
-            <pc:docMk/>
-            <pc:sldMk cId="732373036" sldId="631"/>
-            <ac:spMk id="28" creationId="{111C7C9B-AACC-778B-FEBE-FE09BA94B17F}"/>
-          </ac:spMkLst>
-        </pc:spChg>
-        <pc:spChg chg="del">
-          <ac:chgData name="성우 최" userId="b39b9c6800b01a47" providerId="LiveId" clId="{86918D44-C542-442D-8291-F46EC03904AF}" dt="2026-04-06T02:51:44.613" v="5" actId="478"/>
-          <ac:spMkLst>
-            <pc:docMk/>
-            <pc:sldMk cId="732373036" sldId="631"/>
-            <ac:spMk id="40" creationId="{1ADC9AD5-7290-EE47-63C7-8B32E8EE5DF5}"/>
-          </ac:spMkLst>
-        </pc:spChg>
-        <pc:spChg chg="del">
-          <ac:chgData name="성우 최" userId="b39b9c6800b01a47" providerId="LiveId" clId="{86918D44-C542-442D-8291-F46EC03904AF}" dt="2026-04-06T02:51:29.916" v="0" actId="478"/>
-          <ac:spMkLst>
-            <pc:docMk/>
-            <pc:sldMk cId="732373036" sldId="631"/>
-            <ac:spMk id="41" creationId="{4D75D69F-2AA7-D20C-9D37-EACFF98DDDE3}"/>
-          </ac:spMkLst>
-        </pc:spChg>
-        <pc:spChg chg="del">
-          <ac:chgData name="성우 최" userId="b39b9c6800b01a47" providerId="LiveId" clId="{86918D44-C542-442D-8291-F46EC03904AF}" dt="2026-04-06T02:51:29.916" v="0" actId="478"/>
-          <ac:spMkLst>
-            <pc:docMk/>
-            <pc:sldMk cId="732373036" sldId="631"/>
-            <ac:spMk id="42" creationId="{A54F3253-725D-F976-70B9-1B9C0EF0BEA0}"/>
-          </ac:spMkLst>
-        </pc:spChg>
-        <pc:spChg chg="del mod">
-          <ac:chgData name="성우 최" userId="b39b9c6800b01a47" providerId="LiveId" clId="{86918D44-C542-442D-8291-F46EC03904AF}" dt="2026-04-06T02:51:36.647" v="3" actId="478"/>
-          <ac:spMkLst>
-            <pc:docMk/>
-            <pc:sldMk cId="732373036" sldId="631"/>
-            <ac:spMk id="48" creationId="{E7CF0C2A-E52B-9BAB-734C-84848492587F}"/>
-          </ac:spMkLst>
-        </pc:spChg>
-        <pc:spChg chg="mod">
-          <ac:chgData name="성우 최" userId="b39b9c6800b01a47" providerId="LiveId" clId="{86918D44-C542-442D-8291-F46EC03904AF}" dt="2026-04-06T03:18:17.764" v="306" actId="20577"/>
-          <ac:spMkLst>
-            <pc:docMk/>
-            <pc:sldMk cId="732373036" sldId="631"/>
-            <ac:spMk id="63" creationId="{8307E9EA-854D-5043-A424-6AABDCF071B2}"/>
-          </ac:spMkLst>
-        </pc:spChg>
-        <pc:graphicFrameChg chg="add mod modGraphic">
-          <ac:chgData name="성우 최" userId="b39b9c6800b01a47" providerId="LiveId" clId="{86918D44-C542-442D-8291-F46EC03904AF}" dt="2026-04-06T03:16:08.265" v="257" actId="207"/>
-          <ac:graphicFrameMkLst>
-            <pc:docMk/>
-            <pc:sldMk cId="732373036" sldId="631"/>
-            <ac:graphicFrameMk id="3" creationId="{CEC2CACA-8313-90C3-3996-4D1BEAB4489E}"/>
-          </ac:graphicFrameMkLst>
-        </pc:graphicFrameChg>
-        <pc:graphicFrameChg chg="add mod modGraphic">
-          <ac:chgData name="성우 최" userId="b39b9c6800b01a47" providerId="LiveId" clId="{86918D44-C542-442D-8291-F46EC03904AF}" dt="2026-04-06T03:14:27.047" v="241" actId="207"/>
-          <ac:graphicFrameMkLst>
-            <pc:docMk/>
-            <pc:sldMk cId="732373036" sldId="631"/>
-            <ac:graphicFrameMk id="4" creationId="{0E72F598-2055-F772-E317-C5272BA32271}"/>
-          </ac:graphicFrameMkLst>
-        </pc:graphicFrameChg>
-        <pc:graphicFrameChg chg="add mod modGraphic">
-          <ac:chgData name="성우 최" userId="b39b9c6800b01a47" providerId="LiveId" clId="{86918D44-C542-442D-8291-F46EC03904AF}" dt="2026-04-06T03:14:30.142" v="242" actId="207"/>
-          <ac:graphicFrameMkLst>
-            <pc:docMk/>
-            <pc:sldMk cId="732373036" sldId="631"/>
-            <ac:graphicFrameMk id="5" creationId="{B2A4D03E-4136-09EB-1133-FBB93D6E2DC0}"/>
-          </ac:graphicFrameMkLst>
-        </pc:graphicFrameChg>
-        <pc:graphicFrameChg chg="add mod modGraphic">
-          <ac:chgData name="성우 최" userId="b39b9c6800b01a47" providerId="LiveId" clId="{86918D44-C542-442D-8291-F46EC03904AF}" dt="2026-04-06T03:13:28.566" v="225" actId="207"/>
-          <ac:graphicFrameMkLst>
-            <pc:docMk/>
-            <pc:sldMk cId="732373036" sldId="631"/>
-            <ac:graphicFrameMk id="6" creationId="{9469121B-14BE-B846-9E02-5E53459318C1}"/>
-          </ac:graphicFrameMkLst>
-        </pc:graphicFrameChg>
-        <pc:graphicFrameChg chg="add mod modGraphic">
-          <ac:chgData name="성우 최" userId="b39b9c6800b01a47" providerId="LiveId" clId="{86918D44-C542-442D-8291-F46EC03904AF}" dt="2026-04-06T03:02:08.798" v="94" actId="20577"/>
-          <ac:graphicFrameMkLst>
-            <pc:docMk/>
-            <pc:sldMk cId="732373036" sldId="631"/>
-            <ac:graphicFrameMk id="7" creationId="{CDB8F64F-C72B-356F-2242-DA9DEAFF3A59}"/>
-          </ac:graphicFrameMkLst>
-        </pc:graphicFrameChg>
-        <pc:graphicFrameChg chg="add mod">
-          <ac:chgData name="성우 최" userId="b39b9c6800b01a47" providerId="LiveId" clId="{86918D44-C542-442D-8291-F46EC03904AF}" dt="2026-04-06T02:58:27.957" v="13" actId="1076"/>
-          <ac:graphicFrameMkLst>
-            <pc:docMk/>
-            <pc:sldMk cId="732373036" sldId="631"/>
-            <ac:graphicFrameMk id="8" creationId="{4A527B3A-87F4-0F6F-4815-B9FFACBC18F9}"/>
-          </ac:graphicFrameMkLst>
-        </pc:graphicFrameChg>
-        <pc:graphicFrameChg chg="modGraphic">
-          <ac:chgData name="성우 최" userId="b39b9c6800b01a47" providerId="LiveId" clId="{86918D44-C542-442D-8291-F46EC03904AF}" dt="2026-04-06T03:13:49.286" v="231" actId="207"/>
-          <ac:graphicFrameMkLst>
-            <pc:docMk/>
-            <pc:sldMk cId="732373036" sldId="631"/>
-            <ac:graphicFrameMk id="9" creationId="{8800139F-8CF1-D888-A9A3-266D392CC9C2}"/>
-          </ac:graphicFrameMkLst>
-        </pc:graphicFrameChg>
-        <pc:graphicFrameChg chg="mod modGraphic">
-          <ac:chgData name="성우 최" userId="b39b9c6800b01a47" providerId="LiveId" clId="{86918D44-C542-442D-8291-F46EC03904AF}" dt="2026-04-06T03:13:42.781" v="229" actId="207"/>
-          <ac:graphicFrameMkLst>
-            <pc:docMk/>
-            <pc:sldMk cId="732373036" sldId="631"/>
-            <ac:graphicFrameMk id="10" creationId="{716C0566-57A8-879C-ECD0-D9E792FCC4B3}"/>
-          </ac:graphicFrameMkLst>
-        </pc:graphicFrameChg>
-        <pc:graphicFrameChg chg="mod modGraphic">
-          <ac:chgData name="성우 최" userId="b39b9c6800b01a47" providerId="LiveId" clId="{86918D44-C542-442D-8291-F46EC03904AF}" dt="2026-04-06T03:13:52.255" v="232" actId="207"/>
-          <ac:graphicFrameMkLst>
-            <pc:docMk/>
-            <pc:sldMk cId="732373036" sldId="631"/>
-            <ac:graphicFrameMk id="11" creationId="{E1060672-7C4D-101F-C72E-AD8B4FDDED5E}"/>
-          </ac:graphicFrameMkLst>
-        </pc:graphicFrameChg>
-        <pc:graphicFrameChg chg="modGraphic">
-          <ac:chgData name="성우 최" userId="b39b9c6800b01a47" providerId="LiveId" clId="{86918D44-C542-442D-8291-F46EC03904AF}" dt="2026-04-06T03:13:55.570" v="233" actId="207"/>
-          <ac:graphicFrameMkLst>
-            <pc:docMk/>
-            <pc:sldMk cId="732373036" sldId="631"/>
-            <ac:graphicFrameMk id="12" creationId="{6894996B-1955-AA1C-43A6-EFE96D2BAAAD}"/>
-          </ac:graphicFrameMkLst>
-        </pc:graphicFrameChg>
-        <pc:graphicFrameChg chg="mod modGraphic">
-          <ac:chgData name="성우 최" userId="b39b9c6800b01a47" providerId="LiveId" clId="{86918D44-C542-442D-8291-F46EC03904AF}" dt="2026-04-06T03:14:19.575" v="239" actId="207"/>
-          <ac:graphicFrameMkLst>
-            <pc:docMk/>
-            <pc:sldMk cId="732373036" sldId="631"/>
-            <ac:graphicFrameMk id="13" creationId="{326DE86A-DF34-5AB5-0C6E-FB2E11A66667}"/>
-          </ac:graphicFrameMkLst>
-        </pc:graphicFrameChg>
-        <pc:graphicFrameChg chg="mod modGraphic">
-          <ac:chgData name="성우 최" userId="b39b9c6800b01a47" providerId="LiveId" clId="{86918D44-C542-442D-8291-F46EC03904AF}" dt="2026-04-06T03:14:15.066" v="238" actId="207"/>
-          <ac:graphicFrameMkLst>
-            <pc:docMk/>
-            <pc:sldMk cId="732373036" sldId="631"/>
-            <ac:graphicFrameMk id="14" creationId="{DC55959D-15A8-878D-7DD4-AA19E67E2FCF}"/>
-          </ac:graphicFrameMkLst>
-        </pc:graphicFrameChg>
-        <pc:graphicFrameChg chg="mod modGraphic">
-          <ac:chgData name="성우 최" userId="b39b9c6800b01a47" providerId="LiveId" clId="{86918D44-C542-442D-8291-F46EC03904AF}" dt="2026-04-06T03:14:23.925" v="240" actId="207"/>
-          <ac:graphicFrameMkLst>
-            <pc:docMk/>
-            <pc:sldMk cId="732373036" sldId="631"/>
-            <ac:graphicFrameMk id="15" creationId="{28341762-42B1-DA8D-34C4-96E48589B49E}"/>
-          </ac:graphicFrameMkLst>
-        </pc:graphicFrameChg>
-        <pc:graphicFrameChg chg="add del mod modGraphic">
-          <ac:chgData name="성우 최" userId="b39b9c6800b01a47" providerId="LiveId" clId="{86918D44-C542-442D-8291-F46EC03904AF}" dt="2026-04-06T03:14:07.167" v="236" actId="207"/>
-          <ac:graphicFrameMkLst>
-            <pc:docMk/>
-            <pc:sldMk cId="732373036" sldId="631"/>
-            <ac:graphicFrameMk id="16" creationId="{A54B7138-C35A-BED5-BDDC-F9260C286493}"/>
-          </ac:graphicFrameMkLst>
-        </pc:graphicFrameChg>
-        <pc:graphicFrameChg chg="add mod modGraphic">
-          <ac:chgData name="성우 최" userId="b39b9c6800b01a47" providerId="LiveId" clId="{86918D44-C542-442D-8291-F46EC03904AF}" dt="2026-04-06T03:01:45.200" v="79" actId="1076"/>
-          <ac:graphicFrameMkLst>
-            <pc:docMk/>
-            <pc:sldMk cId="732373036" sldId="631"/>
-            <ac:graphicFrameMk id="17" creationId="{2B8D2E20-7FE3-9E5B-10AD-3FF3C8A33DE0}"/>
-          </ac:graphicFrameMkLst>
-        </pc:graphicFrameChg>
-        <pc:graphicFrameChg chg="del">
-          <ac:chgData name="성우 최" userId="b39b9c6800b01a47" providerId="LiveId" clId="{86918D44-C542-442D-8291-F46EC03904AF}" dt="2026-04-06T02:51:29.916" v="0" actId="478"/>
-          <ac:graphicFrameMkLst>
-            <pc:docMk/>
-            <pc:sldMk cId="732373036" sldId="631"/>
-            <ac:graphicFrameMk id="21" creationId="{AB7AEDB2-B9B3-F10A-BDBD-81E69B4B1E98}"/>
-          </ac:graphicFrameMkLst>
-        </pc:graphicFrameChg>
-        <pc:graphicFrameChg chg="del">
-          <ac:chgData name="성우 최" userId="b39b9c6800b01a47" providerId="LiveId" clId="{86918D44-C542-442D-8291-F46EC03904AF}" dt="2026-04-06T02:51:29.916" v="0" actId="478"/>
-          <ac:graphicFrameMkLst>
-            <pc:docMk/>
-            <pc:sldMk cId="732373036" sldId="631"/>
-            <ac:graphicFrameMk id="22" creationId="{1A1B48EB-045E-9746-45DA-FFC098780756}"/>
-          </ac:graphicFrameMkLst>
-        </pc:graphicFrameChg>
-        <pc:graphicFrameChg chg="del">
-          <ac:chgData name="성우 최" userId="b39b9c6800b01a47" providerId="LiveId" clId="{86918D44-C542-442D-8291-F46EC03904AF}" dt="2026-04-06T02:51:29.916" v="0" actId="478"/>
-          <ac:graphicFrameMkLst>
-            <pc:docMk/>
-            <pc:sldMk cId="732373036" sldId="631"/>
-            <ac:graphicFrameMk id="23" creationId="{3DEE24BE-14DA-E2E2-3E77-BF3E1822C79B}"/>
-          </ac:graphicFrameMkLst>
-        </pc:graphicFrameChg>
-        <pc:graphicFrameChg chg="del">
-          <ac:chgData name="성우 최" userId="b39b9c6800b01a47" providerId="LiveId" clId="{86918D44-C542-442D-8291-F46EC03904AF}" dt="2026-04-06T02:51:29.916" v="0" actId="478"/>
-          <ac:graphicFrameMkLst>
-            <pc:docMk/>
-            <pc:sldMk cId="732373036" sldId="631"/>
-            <ac:graphicFrameMk id="24" creationId="{748717BC-2CA2-8786-8464-9ADF20DED980}"/>
-          </ac:graphicFrameMkLst>
-        </pc:graphicFrameChg>
-        <pc:graphicFrameChg chg="modGraphic">
-          <ac:chgData name="성우 최" userId="b39b9c6800b01a47" providerId="LiveId" clId="{86918D44-C542-442D-8291-F46EC03904AF}" dt="2026-04-06T03:00:59.688" v="61" actId="20577"/>
-          <ac:graphicFrameMkLst>
-            <pc:docMk/>
-            <pc:sldMk cId="732373036" sldId="631"/>
-            <ac:graphicFrameMk id="25" creationId="{FCE2D824-54EB-FDE8-4F2C-8A93B8BC6B55}"/>
-          </ac:graphicFrameMkLst>
-        </pc:graphicFrameChg>
-        <pc:graphicFrameChg chg="mod modGraphic">
-          <ac:chgData name="성우 최" userId="b39b9c6800b01a47" providerId="LiveId" clId="{86918D44-C542-442D-8291-F46EC03904AF}" dt="2026-04-06T03:01:17.624" v="78" actId="20577"/>
-          <ac:graphicFrameMkLst>
-            <pc:docMk/>
-            <pc:sldMk cId="732373036" sldId="631"/>
-            <ac:graphicFrameMk id="26" creationId="{7EE22165-1381-E7F6-D1FB-FA74ADD08A27}"/>
-          </ac:graphicFrameMkLst>
-        </pc:graphicFrameChg>
-        <pc:graphicFrameChg chg="del">
-          <ac:chgData name="성우 최" userId="b39b9c6800b01a47" providerId="LiveId" clId="{86918D44-C542-442D-8291-F46EC03904AF}" dt="2026-04-06T02:51:32.456" v="1" actId="478"/>
-          <ac:graphicFrameMkLst>
-            <pc:docMk/>
-            <pc:sldMk cId="732373036" sldId="631"/>
-            <ac:graphicFrameMk id="27" creationId="{8AEBBD91-3A0C-33EF-18E7-72FBF1069675}"/>
-          </ac:graphicFrameMkLst>
-        </pc:graphicFrameChg>
-        <pc:graphicFrameChg chg="del">
-          <ac:chgData name="성우 최" userId="b39b9c6800b01a47" providerId="LiveId" clId="{86918D44-C542-442D-8291-F46EC03904AF}" dt="2026-04-06T02:51:52.282" v="7" actId="478"/>
-          <ac:graphicFrameMkLst>
-            <pc:docMk/>
-            <pc:sldMk cId="732373036" sldId="631"/>
-            <ac:graphicFrameMk id="37" creationId="{E11D103D-EFB1-6D74-0EB6-F1A4D5106600}"/>
-          </ac:graphicFrameMkLst>
-        </pc:graphicFrameChg>
-        <pc:graphicFrameChg chg="modGraphic">
-          <ac:chgData name="성우 최" userId="b39b9c6800b01a47" providerId="LiveId" clId="{86918D44-C542-442D-8291-F46EC03904AF}" dt="2026-04-06T03:20:00.694" v="416" actId="20577"/>
-          <ac:graphicFrameMkLst>
-            <pc:docMk/>
-            <pc:sldMk cId="732373036" sldId="631"/>
-            <ac:graphicFrameMk id="49" creationId="{232E044F-F2AC-89BC-6E6D-DEAFC545F709}"/>
-          </ac:graphicFrameMkLst>
-        </pc:graphicFrameChg>
-        <pc:graphicFrameChg chg="modGraphic">
-          <ac:chgData name="성우 최" userId="b39b9c6800b01a47" providerId="LiveId" clId="{86918D44-C542-442D-8291-F46EC03904AF}" dt="2026-04-06T02:57:39.693" v="9" actId="20577"/>
-          <ac:graphicFrameMkLst>
-            <pc:docMk/>
-            <pc:sldMk cId="732373036" sldId="631"/>
-            <ac:graphicFrameMk id="50" creationId="{8F915314-7840-C223-AE39-C5A8838F7203}"/>
-          </ac:graphicFrameMkLst>
-        </pc:graphicFrameChg>
-        <pc:graphicFrameChg chg="mod modGraphic">
-          <ac:chgData name="성우 최" userId="b39b9c6800b01a47" providerId="LiveId" clId="{86918D44-C542-442D-8291-F46EC03904AF}" dt="2026-04-06T03:16:23.535" v="263" actId="207"/>
-          <ac:graphicFrameMkLst>
-            <pc:docMk/>
-            <pc:sldMk cId="732373036" sldId="631"/>
-            <ac:graphicFrameMk id="52" creationId="{1B545751-D096-95D5-7EE3-9855F26510B0}"/>
-          </ac:graphicFrameMkLst>
-        </pc:graphicFrameChg>
-        <pc:graphicFrameChg chg="mod modGraphic">
-          <ac:chgData name="성우 최" userId="b39b9c6800b01a47" providerId="LiveId" clId="{86918D44-C542-442D-8291-F46EC03904AF}" dt="2026-04-06T03:16:21.245" v="262" actId="207"/>
-          <ac:graphicFrameMkLst>
-            <pc:docMk/>
-            <pc:sldMk cId="732373036" sldId="631"/>
-            <ac:graphicFrameMk id="53" creationId="{44ACD3D0-2149-1555-85AA-B580BD684696}"/>
-          </ac:graphicFrameMkLst>
-        </pc:graphicFrameChg>
-        <pc:graphicFrameChg chg="mod modGraphic">
-          <ac:chgData name="성우 최" userId="b39b9c6800b01a47" providerId="LiveId" clId="{86918D44-C542-442D-8291-F46EC03904AF}" dt="2026-04-06T03:16:16.815" v="261" actId="207"/>
-          <ac:graphicFrameMkLst>
-            <pc:docMk/>
-            <pc:sldMk cId="732373036" sldId="631"/>
-            <ac:graphicFrameMk id="54" creationId="{6C758D16-C8C9-EAAF-34D7-AD083C1439A5}"/>
-          </ac:graphicFrameMkLst>
-        </pc:graphicFrameChg>
-        <pc:graphicFrameChg chg="mod modGraphic">
-          <ac:chgData name="성우 최" userId="b39b9c6800b01a47" providerId="LiveId" clId="{86918D44-C542-442D-8291-F46EC03904AF}" dt="2026-04-06T03:16:10.865" v="258" actId="20577"/>
-          <ac:graphicFrameMkLst>
-            <pc:docMk/>
-            <pc:sldMk cId="732373036" sldId="631"/>
-            <ac:graphicFrameMk id="55" creationId="{F648B611-AB20-DFE5-B7DC-2C55CBDE8A52}"/>
-          </ac:graphicFrameMkLst>
-        </pc:graphicFrameChg>
-        <pc:graphicFrameChg chg="modGraphic">
-          <ac:chgData name="성우 최" userId="b39b9c6800b01a47" providerId="LiveId" clId="{86918D44-C542-442D-8291-F46EC03904AF}" dt="2026-04-06T03:20:23.261" v="427" actId="20577"/>
-          <ac:graphicFrameMkLst>
-            <pc:docMk/>
-            <pc:sldMk cId="732373036" sldId="631"/>
-            <ac:graphicFrameMk id="56" creationId="{E3DD2E6A-7EC7-7652-266B-A96E0D8767EE}"/>
-          </ac:graphicFrameMkLst>
-        </pc:graphicFrameChg>
-        <pc:graphicFrameChg chg="mod">
-          <ac:chgData name="성우 최" userId="b39b9c6800b01a47" providerId="LiveId" clId="{86918D44-C542-442D-8291-F46EC03904AF}" dt="2026-04-06T02:59:16.992" v="15" actId="1076"/>
-          <ac:graphicFrameMkLst>
-            <pc:docMk/>
-            <pc:sldMk cId="732373036" sldId="631"/>
-            <ac:graphicFrameMk id="70" creationId="{BB7C4D21-DF64-ED70-52D7-8E8D440E5D1D}"/>
-          </ac:graphicFrameMkLst>
-        </pc:graphicFrameChg>
-        <pc:graphicFrameChg chg="del">
-          <ac:chgData name="성우 최" userId="b39b9c6800b01a47" providerId="LiveId" clId="{86918D44-C542-442D-8291-F46EC03904AF}" dt="2026-04-06T02:51:29.916" v="0" actId="478"/>
-          <ac:graphicFrameMkLst>
-            <pc:docMk/>
-            <pc:sldMk cId="732373036" sldId="631"/>
-            <ac:graphicFrameMk id="71" creationId="{7F685085-8F98-E839-EAF1-7076903CD746}"/>
-          </ac:graphicFrameMkLst>
-        </pc:graphicFrameChg>
-        <pc:graphicFrameChg chg="mod modGraphic">
-          <ac:chgData name="성우 최" userId="b39b9c6800b01a47" providerId="LiveId" clId="{86918D44-C542-442D-8291-F46EC03904AF}" dt="2026-04-06T03:18:03.034" v="279" actId="1076"/>
-          <ac:graphicFrameMkLst>
-            <pc:docMk/>
-            <pc:sldMk cId="732373036" sldId="631"/>
-            <ac:graphicFrameMk id="72" creationId="{6384C348-D15E-DEA8-4CA6-DA01A7F97C9E}"/>
-          </ac:graphicFrameMkLst>
-        </pc:graphicFrameChg>
-        <pc:cxnChg chg="del">
-          <ac:chgData name="성우 최" userId="b39b9c6800b01a47" providerId="LiveId" clId="{86918D44-C542-442D-8291-F46EC03904AF}" dt="2026-04-06T02:51:46.662" v="6" actId="478"/>
-          <ac:cxnSpMkLst>
-            <pc:docMk/>
-            <pc:sldMk cId="732373036" sldId="631"/>
-            <ac:cxnSpMk id="39" creationId="{3448C489-A7D9-904C-8A0F-A4172405B1C8}"/>
-          </ac:cxnSpMkLst>
-        </pc:cxnChg>
-        <pc:cxnChg chg="del">
-          <ac:chgData name="성우 최" userId="b39b9c6800b01a47" providerId="LiveId" clId="{86918D44-C542-442D-8291-F46EC03904AF}" dt="2026-04-06T02:51:29.916" v="0" actId="478"/>
-          <ac:cxnSpMkLst>
-            <pc:docMk/>
-            <pc:sldMk cId="732373036" sldId="631"/>
-            <ac:cxnSpMk id="44" creationId="{DDD7B160-1695-7C65-A004-79D402315286}"/>
-          </ac:cxnSpMkLst>
-        </pc:cxnChg>
-        <pc:cxnChg chg="del mod">
-          <ac:chgData name="성우 최" userId="b39b9c6800b01a47" providerId="LiveId" clId="{86918D44-C542-442D-8291-F46EC03904AF}" dt="2026-04-06T02:51:38.405" v="4" actId="478"/>
-          <ac:cxnSpMkLst>
-            <pc:docMk/>
-            <pc:sldMk cId="732373036" sldId="631"/>
-            <ac:cxnSpMk id="46" creationId="{28BC6893-1CF5-811C-7415-DF2769815D50}"/>
-          </ac:cxnSpMkLst>
-        </pc:cxnChg>
-      </pc:sldChg>
-      <pc:sldChg chg="addSp delSp modSp add mod">
-        <pc:chgData name="성우 최" userId="b39b9c6800b01a47" providerId="LiveId" clId="{86918D44-C542-442D-8291-F46EC03904AF}" dt="2026-04-06T06:35:38.346" v="822" actId="207"/>
-        <pc:sldMkLst>
-          <pc:docMk/>
-          <pc:sldMk cId="1567596129" sldId="632"/>
-        </pc:sldMkLst>
-        <pc:spChg chg="del mod">
-          <ac:chgData name="성우 최" userId="b39b9c6800b01a47" providerId="LiveId" clId="{86918D44-C542-442D-8291-F46EC03904AF}" dt="2026-04-06T04:07:05.465" v="628" actId="478"/>
-          <ac:spMkLst>
-            <pc:docMk/>
-            <pc:sldMk cId="1567596129" sldId="632"/>
-            <ac:spMk id="3" creationId="{1AF80501-5DA4-9EEB-5A58-3737C1AB408D}"/>
-          </ac:spMkLst>
-        </pc:spChg>
-        <pc:spChg chg="del">
-          <ac:chgData name="성우 최" userId="b39b9c6800b01a47" providerId="LiveId" clId="{86918D44-C542-442D-8291-F46EC03904AF}" dt="2026-04-06T04:07:10.062" v="629" actId="478"/>
-          <ac:spMkLst>
-            <pc:docMk/>
-            <pc:sldMk cId="1567596129" sldId="632"/>
-            <ac:spMk id="13" creationId="{68C90FBF-F1A3-7E0A-AF66-D1024F23D13E}"/>
-          </ac:spMkLst>
-        </pc:spChg>
-        <pc:spChg chg="del">
-          <ac:chgData name="성우 최" userId="b39b9c6800b01a47" providerId="LiveId" clId="{86918D44-C542-442D-8291-F46EC03904AF}" dt="2026-04-06T04:07:10.062" v="629" actId="478"/>
-          <ac:spMkLst>
-            <pc:docMk/>
-            <pc:sldMk cId="1567596129" sldId="632"/>
-            <ac:spMk id="22" creationId="{90041D93-82C6-AC0F-B0F8-C6DF174C0F9E}"/>
-          </ac:spMkLst>
-        </pc:spChg>
-        <pc:spChg chg="del">
-          <ac:chgData name="성우 최" userId="b39b9c6800b01a47" providerId="LiveId" clId="{86918D44-C542-442D-8291-F46EC03904AF}" dt="2026-04-06T04:07:10.062" v="629" actId="478"/>
-          <ac:spMkLst>
-            <pc:docMk/>
-            <pc:sldMk cId="1567596129" sldId="632"/>
-            <ac:spMk id="23" creationId="{BCCFACE4-A887-2FA9-3725-60C39A785019}"/>
-          </ac:spMkLst>
-        </pc:spChg>
-        <pc:spChg chg="del">
-          <ac:chgData name="성우 최" userId="b39b9c6800b01a47" providerId="LiveId" clId="{86918D44-C542-442D-8291-F46EC03904AF}" dt="2026-04-06T04:07:10.062" v="629" actId="478"/>
-          <ac:spMkLst>
-            <pc:docMk/>
-            <pc:sldMk cId="1567596129" sldId="632"/>
-            <ac:spMk id="28" creationId="{F980F742-B101-B2AE-7CB5-33B53899641B}"/>
-          </ac:spMkLst>
-        </pc:spChg>
-        <pc:spChg chg="del">
-          <ac:chgData name="성우 최" userId="b39b9c6800b01a47" providerId="LiveId" clId="{86918D44-C542-442D-8291-F46EC03904AF}" dt="2026-04-06T04:07:10.062" v="629" actId="478"/>
-          <ac:spMkLst>
-            <pc:docMk/>
-            <pc:sldMk cId="1567596129" sldId="632"/>
-            <ac:spMk id="29" creationId="{3EBA7613-2111-2860-0574-C18649D07EDF}"/>
-          </ac:spMkLst>
-        </pc:spChg>
-        <pc:spChg chg="del">
-          <ac:chgData name="성우 최" userId="b39b9c6800b01a47" providerId="LiveId" clId="{86918D44-C542-442D-8291-F46EC03904AF}" dt="2026-04-06T04:07:10.062" v="629" actId="478"/>
-          <ac:spMkLst>
-            <pc:docMk/>
-            <pc:sldMk cId="1567596129" sldId="632"/>
-            <ac:spMk id="38" creationId="{90E809C2-AC33-DC11-875E-13BB8882B279}"/>
-          </ac:spMkLst>
-        </pc:spChg>
-        <pc:spChg chg="del">
-          <ac:chgData name="성우 최" userId="b39b9c6800b01a47" providerId="LiveId" clId="{86918D44-C542-442D-8291-F46EC03904AF}" dt="2026-04-06T04:07:10.062" v="629" actId="478"/>
-          <ac:spMkLst>
-            <pc:docMk/>
-            <pc:sldMk cId="1567596129" sldId="632"/>
-            <ac:spMk id="39" creationId="{E3A9A7AF-FB67-71DD-C4E3-0E56C6D09B0C}"/>
-          </ac:spMkLst>
-        </pc:spChg>
-        <pc:spChg chg="del">
-          <ac:chgData name="성우 최" userId="b39b9c6800b01a47" providerId="LiveId" clId="{86918D44-C542-442D-8291-F46EC03904AF}" dt="2026-04-06T04:07:10.062" v="629" actId="478"/>
-          <ac:spMkLst>
-            <pc:docMk/>
-            <pc:sldMk cId="1567596129" sldId="632"/>
-            <ac:spMk id="40" creationId="{440ED5A9-983E-79A6-016E-BFD14AB17B5D}"/>
-          </ac:spMkLst>
-        </pc:spChg>
-        <pc:spChg chg="del">
-          <ac:chgData name="성우 최" userId="b39b9c6800b01a47" providerId="LiveId" clId="{86918D44-C542-442D-8291-F46EC03904AF}" dt="2026-04-06T04:07:10.062" v="629" actId="478"/>
-          <ac:spMkLst>
-            <pc:docMk/>
-            <pc:sldMk cId="1567596129" sldId="632"/>
-            <ac:spMk id="41" creationId="{F4D47117-6291-5890-F68F-ACE99C5C8D1B}"/>
-          </ac:spMkLst>
-        </pc:spChg>
-        <pc:spChg chg="add mod">
-          <ac:chgData name="성우 최" userId="b39b9c6800b01a47" providerId="LiveId" clId="{86918D44-C542-442D-8291-F46EC03904AF}" dt="2026-04-06T04:15:49.985" v="730" actId="1076"/>
-          <ac:spMkLst>
-            <pc:docMk/>
-            <pc:sldMk cId="1567596129" sldId="632"/>
-            <ac:spMk id="42" creationId="{6524431A-E966-E9CD-6C7F-CB55A5A1AB1B}"/>
-          </ac:spMkLst>
-        </pc:spChg>
-        <pc:spChg chg="del">
-          <ac:chgData name="성우 최" userId="b39b9c6800b01a47" providerId="LiveId" clId="{86918D44-C542-442D-8291-F46EC03904AF}" dt="2026-04-06T04:07:10.062" v="629" actId="478"/>
-          <ac:spMkLst>
-            <pc:docMk/>
-            <pc:sldMk cId="1567596129" sldId="632"/>
-            <ac:spMk id="44" creationId="{7166EA8D-4E56-A1BF-EBA2-AA76DD6EA2A1}"/>
-          </ac:spMkLst>
-        </pc:spChg>
-        <pc:spChg chg="add mod">
-          <ac:chgData name="성우 최" userId="b39b9c6800b01a47" providerId="LiveId" clId="{86918D44-C542-442D-8291-F46EC03904AF}" dt="2026-04-06T04:15:52.982" v="732" actId="20577"/>
-          <ac:spMkLst>
-            <pc:docMk/>
-            <pc:sldMk cId="1567596129" sldId="632"/>
-            <ac:spMk id="46" creationId="{8CA08964-7FFF-EA7D-BA51-E2C3A8ACE574}"/>
-          </ac:spMkLst>
-        </pc:spChg>
-        <pc:spChg chg="add mod">
-          <ac:chgData name="성우 최" userId="b39b9c6800b01a47" providerId="LiveId" clId="{86918D44-C542-442D-8291-F46EC03904AF}" dt="2026-04-06T04:16:09.584" v="736" actId="1076"/>
-          <ac:spMkLst>
-            <pc:docMk/>
-            <pc:sldMk cId="1567596129" sldId="632"/>
-            <ac:spMk id="48" creationId="{70F169F7-ECE9-6AB3-A613-51DF0812F396}"/>
-          </ac:spMkLst>
-        </pc:spChg>
-        <pc:spChg chg="add mod">
-          <ac:chgData name="성우 최" userId="b39b9c6800b01a47" providerId="LiveId" clId="{86918D44-C542-442D-8291-F46EC03904AF}" dt="2026-04-06T04:16:20.712" v="738" actId="1076"/>
-          <ac:spMkLst>
-            <pc:docMk/>
-            <pc:sldMk cId="1567596129" sldId="632"/>
-            <ac:spMk id="49" creationId="{5FC81804-3F8F-C488-9115-BC490FFF23D8}"/>
-          </ac:spMkLst>
-        </pc:spChg>
-        <pc:spChg chg="add mod">
-          <ac:chgData name="성우 최" userId="b39b9c6800b01a47" providerId="LiveId" clId="{86918D44-C542-442D-8291-F46EC03904AF}" dt="2026-04-06T04:16:34.115" v="740" actId="1076"/>
-          <ac:spMkLst>
-            <pc:docMk/>
-            <pc:sldMk cId="1567596129" sldId="632"/>
-            <ac:spMk id="50" creationId="{24134269-0D62-F317-3536-37888AAB7702}"/>
-          </ac:spMkLst>
-        </pc:spChg>
-        <pc:spChg chg="add mod">
-          <ac:chgData name="성우 최" userId="b39b9c6800b01a47" providerId="LiveId" clId="{86918D44-C542-442D-8291-F46EC03904AF}" dt="2026-04-06T04:16:41.693" v="742" actId="1076"/>
-          <ac:spMkLst>
-            <pc:docMk/>
-            <pc:sldMk cId="1567596129" sldId="632"/>
-            <ac:spMk id="51" creationId="{08C835F5-A700-5490-999E-EB608DA78B7B}"/>
-          </ac:spMkLst>
-        </pc:spChg>
-        <pc:spChg chg="add mod">
-          <ac:chgData name="성우 최" userId="b39b9c6800b01a47" providerId="LiveId" clId="{86918D44-C542-442D-8291-F46EC03904AF}" dt="2026-04-06T04:21:43.693" v="773" actId="207"/>
-          <ac:spMkLst>
-            <pc:docMk/>
-            <pc:sldMk cId="1567596129" sldId="632"/>
-            <ac:spMk id="52" creationId="{F3A08E36-2505-9BB0-2102-D936530B4684}"/>
-          </ac:spMkLst>
-        </pc:spChg>
-        <pc:spChg chg="add mod">
-          <ac:chgData name="성우 최" userId="b39b9c6800b01a47" providerId="LiveId" clId="{86918D44-C542-442D-8291-F46EC03904AF}" dt="2026-04-06T04:17:19.026" v="748"/>
-          <ac:spMkLst>
-            <pc:docMk/>
-            <pc:sldMk cId="1567596129" sldId="632"/>
-            <ac:spMk id="53" creationId="{30750A24-50EF-680A-A046-DAC9F35AD77E}"/>
-          </ac:spMkLst>
-        </pc:spChg>
-        <pc:spChg chg="add mod">
-          <ac:chgData name="성우 최" userId="b39b9c6800b01a47" providerId="LiveId" clId="{86918D44-C542-442D-8291-F46EC03904AF}" dt="2026-04-06T04:21:47.291" v="774" actId="207"/>
-          <ac:spMkLst>
-            <pc:docMk/>
-            <pc:sldMk cId="1567596129" sldId="632"/>
-            <ac:spMk id="54" creationId="{641266E9-DF32-2187-6C18-EBDF4DEB6082}"/>
-          </ac:spMkLst>
-        </pc:spChg>
-        <pc:spChg chg="add mod">
-          <ac:chgData name="성우 최" userId="b39b9c6800b01a47" providerId="LiveId" clId="{86918D44-C542-442D-8291-F46EC03904AF}" dt="2026-04-06T04:18:42.633" v="762" actId="1076"/>
-          <ac:spMkLst>
-            <pc:docMk/>
-            <pc:sldMk cId="1567596129" sldId="632"/>
-            <ac:spMk id="55" creationId="{1AC46FBC-A1D9-5D37-9D90-DAE4BD958A97}"/>
-          </ac:spMkLst>
-        </pc:spChg>
-        <pc:spChg chg="add mod">
-          <ac:chgData name="성우 최" userId="b39b9c6800b01a47" providerId="LiveId" clId="{86918D44-C542-442D-8291-F46EC03904AF}" dt="2026-04-06T04:22:29.556" v="778" actId="767"/>
-          <ac:spMkLst>
-            <pc:docMk/>
-            <pc:sldMk cId="1567596129" sldId="632"/>
-            <ac:spMk id="59" creationId="{79492EDA-04E5-241F-2741-523D8ED82452}"/>
-          </ac:spMkLst>
-        </pc:spChg>
-        <pc:spChg chg="add mod">
-          <ac:chgData name="성우 최" userId="b39b9c6800b01a47" providerId="LiveId" clId="{86918D44-C542-442D-8291-F46EC03904AF}" dt="2026-04-06T04:23:02.807" v="808" actId="207"/>
-          <ac:spMkLst>
-            <pc:docMk/>
-            <pc:sldMk cId="1567596129" sldId="632"/>
-            <ac:spMk id="60" creationId="{DAA2607F-812F-3EDB-CEAB-38E435E23A46}"/>
-          </ac:spMkLst>
-        </pc:spChg>
-        <pc:graphicFrameChg chg="add mod modGraphic">
-          <ac:chgData name="성우 최" userId="b39b9c6800b01a47" providerId="LiveId" clId="{86918D44-C542-442D-8291-F46EC03904AF}" dt="2026-04-06T04:08:49.143" v="651" actId="255"/>
-          <ac:graphicFrameMkLst>
-            <pc:docMk/>
-            <pc:sldMk cId="1567596129" sldId="632"/>
-            <ac:graphicFrameMk id="4" creationId="{FB25849A-2E13-9294-9EC4-3D6B32B3D783}"/>
-          </ac:graphicFrameMkLst>
-        </pc:graphicFrameChg>
-        <pc:graphicFrameChg chg="add mod modGraphic">
-          <ac:chgData name="성우 최" userId="b39b9c6800b01a47" providerId="LiveId" clId="{86918D44-C542-442D-8291-F46EC03904AF}" dt="2026-04-06T04:16:04.908" v="735" actId="1076"/>
-          <ac:graphicFrameMkLst>
-            <pc:docMk/>
-            <pc:sldMk cId="1567596129" sldId="632"/>
-            <ac:graphicFrameMk id="9" creationId="{520E28AF-F143-A029-6F02-2C67CF4AC4F1}"/>
-          </ac:graphicFrameMkLst>
-        </pc:graphicFrameChg>
-        <pc:graphicFrameChg chg="add mod modGraphic">
-          <ac:chgData name="성우 최" userId="b39b9c6800b01a47" providerId="LiveId" clId="{86918D44-C542-442D-8291-F46EC03904AF}" dt="2026-04-06T04:11:50.044" v="680" actId="255"/>
-          <ac:graphicFrameMkLst>
-            <pc:docMk/>
-            <pc:sldMk cId="1567596129" sldId="632"/>
-            <ac:graphicFrameMk id="11" creationId="{3831102F-ED71-E935-A0A4-762F12888DB6}"/>
-          </ac:graphicFrameMkLst>
-        </pc:graphicFrameChg>
-        <pc:graphicFrameChg chg="add mod modGraphic">
-          <ac:chgData name="성우 최" userId="b39b9c6800b01a47" providerId="LiveId" clId="{86918D44-C542-442D-8291-F46EC03904AF}" dt="2026-04-06T06:35:24.635" v="818"/>
-          <ac:graphicFrameMkLst>
-            <pc:docMk/>
-            <pc:sldMk cId="1567596129" sldId="632"/>
-            <ac:graphicFrameMk id="15" creationId="{AB90FF8D-78A0-87AF-4448-A859DEA9FFCB}"/>
-          </ac:graphicFrameMkLst>
-        </pc:graphicFrameChg>
-        <pc:graphicFrameChg chg="add mod modGraphic">
-          <ac:chgData name="성우 최" userId="b39b9c6800b01a47" providerId="LiveId" clId="{86918D44-C542-442D-8291-F46EC03904AF}" dt="2026-04-06T06:35:38.346" v="822" actId="207"/>
-          <ac:graphicFrameMkLst>
-            <pc:docMk/>
-            <pc:sldMk cId="1567596129" sldId="632"/>
-            <ac:graphicFrameMk id="16" creationId="{C78D6AEA-2312-7B31-DF67-F773860A7B9B}"/>
-          </ac:graphicFrameMkLst>
-        </pc:graphicFrameChg>
-        <pc:graphicFrameChg chg="add mod">
-          <ac:chgData name="성우 최" userId="b39b9c6800b01a47" providerId="LiveId" clId="{86918D44-C542-442D-8291-F46EC03904AF}" dt="2026-04-06T04:12:13.718" v="682" actId="1076"/>
-          <ac:graphicFrameMkLst>
-            <pc:docMk/>
-            <pc:sldMk cId="1567596129" sldId="632"/>
-            <ac:graphicFrameMk id="17" creationId="{F1403041-D3B3-8271-9D40-BDF37CDE45F8}"/>
-          </ac:graphicFrameMkLst>
-        </pc:graphicFrameChg>
-        <pc:graphicFrameChg chg="add mod">
-          <ac:chgData name="성우 최" userId="b39b9c6800b01a47" providerId="LiveId" clId="{86918D44-C542-442D-8291-F46EC03904AF}" dt="2026-04-06T04:12:16.559" v="683"/>
-          <ac:graphicFrameMkLst>
-            <pc:docMk/>
-            <pc:sldMk cId="1567596129" sldId="632"/>
-            <ac:graphicFrameMk id="18" creationId="{07E4F7DB-E2B4-20D5-A60A-3DD3D8941C97}"/>
-          </ac:graphicFrameMkLst>
-        </pc:graphicFrameChg>
-        <pc:graphicFrameChg chg="add mod">
-          <ac:chgData name="성우 최" userId="b39b9c6800b01a47" providerId="LiveId" clId="{86918D44-C542-442D-8291-F46EC03904AF}" dt="2026-04-06T04:12:26.717" v="685" actId="1076"/>
-          <ac:graphicFrameMkLst>
-            <pc:docMk/>
-            <pc:sldMk cId="1567596129" sldId="632"/>
-            <ac:graphicFrameMk id="20" creationId="{683F565A-DE0A-72B0-4F72-74CE7905EEF1}"/>
-          </ac:graphicFrameMkLst>
-        </pc:graphicFrameChg>
-        <pc:graphicFrameChg chg="add mod modGraphic">
-          <ac:chgData name="성우 최" userId="b39b9c6800b01a47" providerId="LiveId" clId="{86918D44-C542-442D-8291-F46EC03904AF}" dt="2026-04-06T04:14:13.313" v="713" actId="20577"/>
-          <ac:graphicFrameMkLst>
-            <pc:docMk/>
-            <pc:sldMk cId="1567596129" sldId="632"/>
-            <ac:graphicFrameMk id="36" creationId="{E0E3A98E-5EB3-F6A8-B8AA-57E083C92075}"/>
-          </ac:graphicFrameMkLst>
-        </pc:graphicFrameChg>
-        <pc:graphicFrameChg chg="add mod modGraphic">
-          <ac:chgData name="성우 최" userId="b39b9c6800b01a47" providerId="LiveId" clId="{86918D44-C542-442D-8291-F46EC03904AF}" dt="2026-04-06T04:14:29.894" v="717" actId="20577"/>
-          <ac:graphicFrameMkLst>
-            <pc:docMk/>
-            <pc:sldMk cId="1567596129" sldId="632"/>
-            <ac:graphicFrameMk id="37" creationId="{5CA4B68D-E035-E370-6314-0CD254D03ACD}"/>
-          </ac:graphicFrameMkLst>
-        </pc:graphicFrameChg>
-        <pc:graphicFrameChg chg="add mod">
-          <ac:chgData name="성우 최" userId="b39b9c6800b01a47" providerId="LiveId" clId="{86918D44-C542-442D-8291-F46EC03904AF}" dt="2026-04-06T04:14:53.066" v="722"/>
-          <ac:graphicFrameMkLst>
-            <pc:docMk/>
-            <pc:sldMk cId="1567596129" sldId="632"/>
-            <ac:graphicFrameMk id="45" creationId="{74F92D7D-D28A-FCF9-77F2-BEFB669A99C0}"/>
-          </ac:graphicFrameMkLst>
-        </pc:graphicFrameChg>
-        <pc:graphicFrameChg chg="add mod modGraphic">
-          <ac:chgData name="성우 최" userId="b39b9c6800b01a47" providerId="LiveId" clId="{86918D44-C542-442D-8291-F46EC03904AF}" dt="2026-04-06T04:21:10.796" v="770"/>
-          <ac:graphicFrameMkLst>
-            <pc:docMk/>
-            <pc:sldMk cId="1567596129" sldId="632"/>
-            <ac:graphicFrameMk id="56" creationId="{A22AF3A9-275B-DB3E-AE35-562EC45E9CCB}"/>
-          </ac:graphicFrameMkLst>
-        </pc:graphicFrameChg>
-        <pc:cxnChg chg="add mod">
-          <ac:chgData name="성우 최" userId="b39b9c6800b01a47" providerId="LiveId" clId="{86918D44-C542-442D-8291-F46EC03904AF}" dt="2026-04-06T04:16:04.908" v="735" actId="1076"/>
-          <ac:cxnSpMkLst>
-            <pc:docMk/>
-            <pc:sldMk cId="1567596129" sldId="632"/>
-            <ac:cxnSpMk id="6" creationId="{B6CC8BE9-9999-47E0-56DD-BF568227C39B}"/>
-          </ac:cxnSpMkLst>
-        </pc:cxnChg>
-        <pc:cxnChg chg="add">
-          <ac:chgData name="성우 최" userId="b39b9c6800b01a47" providerId="LiveId" clId="{86918D44-C542-442D-8291-F46EC03904AF}" dt="2026-04-06T04:09:42.441" v="653" actId="11529"/>
-          <ac:cxnSpMkLst>
-            <pc:docMk/>
-            <pc:sldMk cId="1567596129" sldId="632"/>
-            <ac:cxnSpMk id="8" creationId="{7EF92BA4-3D1A-5806-AE77-F13832366877}"/>
-          </ac:cxnSpMkLst>
-        </pc:cxnChg>
-        <pc:cxnChg chg="add mod">
-          <ac:chgData name="성우 최" userId="b39b9c6800b01a47" providerId="LiveId" clId="{86918D44-C542-442D-8291-F46EC03904AF}" dt="2026-04-06T04:23:54.989" v="811" actId="14100"/>
-          <ac:cxnSpMkLst>
-            <pc:docMk/>
-            <pc:sldMk cId="1567596129" sldId="632"/>
-            <ac:cxnSpMk id="26" creationId="{C85EB64B-A90D-7CB7-CB36-36C22EF28024}"/>
-          </ac:cxnSpMkLst>
-        </pc:cxnChg>
-        <pc:cxnChg chg="add">
-          <ac:chgData name="성우 최" userId="b39b9c6800b01a47" providerId="LiveId" clId="{86918D44-C542-442D-8291-F46EC03904AF}" dt="2026-04-06T04:13:40.834" v="701" actId="11529"/>
-          <ac:cxnSpMkLst>
-            <pc:docMk/>
-            <pc:sldMk cId="1567596129" sldId="632"/>
-            <ac:cxnSpMk id="31" creationId="{A33F3A7B-97BD-7E00-27A0-A014D2C95BF7}"/>
-          </ac:cxnSpMkLst>
-        </pc:cxnChg>
-        <pc:cxnChg chg="add">
-          <ac:chgData name="성우 최" userId="b39b9c6800b01a47" providerId="LiveId" clId="{86918D44-C542-442D-8291-F46EC03904AF}" dt="2026-04-06T04:13:48.288" v="702" actId="11529"/>
-          <ac:cxnSpMkLst>
-            <pc:docMk/>
-            <pc:sldMk cId="1567596129" sldId="632"/>
-            <ac:cxnSpMk id="33" creationId="{C20F477E-8361-C6CD-BDA9-BC1D3A4C76BF}"/>
-          </ac:cxnSpMkLst>
-        </pc:cxnChg>
-        <pc:cxnChg chg="add">
-          <ac:chgData name="성우 최" userId="b39b9c6800b01a47" providerId="LiveId" clId="{86918D44-C542-442D-8291-F46EC03904AF}" dt="2026-04-06T04:13:55.451" v="703" actId="11529"/>
-          <ac:cxnSpMkLst>
-            <pc:docMk/>
-            <pc:sldMk cId="1567596129" sldId="632"/>
-            <ac:cxnSpMk id="35" creationId="{0CE103E1-4546-E1BE-0604-8F0884E51CED}"/>
-          </ac:cxnSpMkLst>
-        </pc:cxnChg>
-        <pc:cxnChg chg="add mod">
-          <ac:chgData name="성우 최" userId="b39b9c6800b01a47" providerId="LiveId" clId="{86918D44-C542-442D-8291-F46EC03904AF}" dt="2026-04-06T04:22:09.067" v="776" actId="208"/>
-          <ac:cxnSpMkLst>
-            <pc:docMk/>
-            <pc:sldMk cId="1567596129" sldId="632"/>
-            <ac:cxnSpMk id="58" creationId="{00121801-C1C5-159B-AB2C-5116F042DBB5}"/>
-          </ac:cxnSpMkLst>
-        </pc:cxnChg>
-      </pc:sldChg>
-      <pc:sldChg chg="new del">
-        <pc:chgData name="성우 최" userId="b39b9c6800b01a47" providerId="LiveId" clId="{86918D44-C542-442D-8291-F46EC03904AF}" dt="2026-04-06T04:06:56.132" v="625" actId="680"/>
-        <pc:sldMkLst>
-          <pc:docMk/>
-          <pc:sldMk cId="1656819028" sldId="632"/>
         </pc:sldMkLst>
       </pc:sldChg>
     </pc:docChg>
@@ -2894,127 +1945,6 @@
     <p:extLst>
       <p:ext uri="{BB962C8B-B14F-4D97-AF65-F5344CB8AC3E}">
         <p14:creationId xmlns:p14="http://schemas.microsoft.com/office/powerpoint/2010/main" val="2857917055"/>
-      </p:ext>
-    </p:extLst>
-  </p:cSld>
-  <p:clrMapOvr>
-    <a:masterClrMapping/>
-  </p:clrMapOvr>
-</p:notes>
-</file>
-
-<file path=ppt/notesSlides/notesSlide5.xml><?xml version="1.0" encoding="utf-8"?>
-<p:notes xmlns:a="http://schemas.openxmlformats.org/drawingml/2006/main" xmlns:r="http://schemas.openxmlformats.org/officeDocument/2006/relationships" xmlns:p="http://schemas.openxmlformats.org/presentationml/2006/main">
-  <p:cSld>
-    <p:spTree>
-      <p:nvGrpSpPr>
-        <p:cNvPr id="1" name="">
-          <a:extLst>
-            <a:ext uri="{FF2B5EF4-FFF2-40B4-BE49-F238E27FC236}">
-              <a16:creationId xmlns:a16="http://schemas.microsoft.com/office/drawing/2014/main" id="{D06300C7-16E6-969F-2BC5-7061B0326D75}"/>
-            </a:ext>
-          </a:extLst>
-        </p:cNvPr>
-        <p:cNvGrpSpPr/>
-        <p:nvPr/>
-      </p:nvGrpSpPr>
-      <p:grpSpPr>
-        <a:xfrm>
-          <a:off x="0" y="0"/>
-          <a:ext cx="0" cy="0"/>
-          <a:chOff x="0" y="0"/>
-          <a:chExt cx="0" cy="0"/>
-        </a:xfrm>
-      </p:grpSpPr>
-      <p:sp>
-        <p:nvSpPr>
-          <p:cNvPr id="2" name="슬라이드 이미지 개체 틀 1">
-            <a:extLst>
-              <a:ext uri="{FF2B5EF4-FFF2-40B4-BE49-F238E27FC236}">
-                <a16:creationId xmlns:a16="http://schemas.microsoft.com/office/drawing/2014/main" id="{E870063C-07F8-D3BB-3DC2-DDC941C08855}"/>
-              </a:ext>
-            </a:extLst>
-          </p:cNvPr>
-          <p:cNvSpPr>
-            <a:spLocks noGrp="1" noRot="1" noChangeAspect="1"/>
-          </p:cNvSpPr>
-          <p:nvPr>
-            <p:ph type="sldImg"/>
-          </p:nvPr>
-        </p:nvSpPr>
-        <p:spPr/>
-      </p:sp>
-      <p:sp>
-        <p:nvSpPr>
-          <p:cNvPr id="3" name="슬라이드 노트 개체 틀 2">
-            <a:extLst>
-              <a:ext uri="{FF2B5EF4-FFF2-40B4-BE49-F238E27FC236}">
-                <a16:creationId xmlns:a16="http://schemas.microsoft.com/office/drawing/2014/main" id="{FCFE5D0D-622F-4419-E777-DF480C882394}"/>
-              </a:ext>
-            </a:extLst>
-          </p:cNvPr>
-          <p:cNvSpPr>
-            <a:spLocks noGrp="1"/>
-          </p:cNvSpPr>
-          <p:nvPr>
-            <p:ph type="body" idx="1"/>
-          </p:nvPr>
-        </p:nvSpPr>
-        <p:spPr/>
-        <p:txBody>
-          <a:bodyPr/>
-          <a:lstStyle/>
-          <a:p>
-            <a:pPr algn="just" latinLnBrk="1">
-              <a:lnSpc>
-                <a:spcPct val="107000"/>
-              </a:lnSpc>
-              <a:spcAft>
-                <a:spcPts val="800"/>
-              </a:spcAft>
-            </a:pPr>
-            <a:endParaRPr lang="en-US" altLang="ko-KR" sz="1600" b="1" kern="100" dirty="0">
-              <a:effectLst/>
-              <a:latin typeface="맑은 고딕" panose="020B0503020000020004" pitchFamily="50" charset="-127"/>
-              <a:ea typeface="맑은 고딕" panose="020B0503020000020004" pitchFamily="50" charset="-127"/>
-              <a:cs typeface="Times New Roman" panose="02020603050405020304" pitchFamily="18" charset="0"/>
-            </a:endParaRPr>
-          </a:p>
-        </p:txBody>
-      </p:sp>
-      <p:sp>
-        <p:nvSpPr>
-          <p:cNvPr id="4" name="슬라이드 번호 개체 틀 3">
-            <a:extLst>
-              <a:ext uri="{FF2B5EF4-FFF2-40B4-BE49-F238E27FC236}">
-                <a16:creationId xmlns:a16="http://schemas.microsoft.com/office/drawing/2014/main" id="{4D2C127D-709A-8772-EDEF-0511000AB862}"/>
-              </a:ext>
-            </a:extLst>
-          </p:cNvPr>
-          <p:cNvSpPr>
-            <a:spLocks noGrp="1"/>
-          </p:cNvSpPr>
-          <p:nvPr>
-            <p:ph type="sldNum" sz="quarter" idx="5"/>
-          </p:nvPr>
-        </p:nvSpPr>
-        <p:spPr/>
-        <p:txBody>
-          <a:bodyPr/>
-          <a:lstStyle/>
-          <a:p>
-            <a:fld id="{D0C664DC-C26E-465D-99FF-B6F4031E277D}" type="slidenum">
-              <a:rPr lang="ko-KR" altLang="en-US" smtClean="0"/>
-              <a:t>6</a:t>
-            </a:fld>
-            <a:endParaRPr lang="ko-KR" altLang="en-US"/>
-          </a:p>
-        </p:txBody>
-      </p:sp>
-    </p:spTree>
-    <p:extLst>
-      <p:ext uri="{BB962C8B-B14F-4D97-AF65-F5344CB8AC3E}">
-        <p14:creationId xmlns:p14="http://schemas.microsoft.com/office/powerpoint/2010/main" val="2183706962"/>
       </p:ext>
     </p:extLst>
   </p:cSld>
@@ -44138,106 +43068,6 @@
 </p:sld>
 </file>
 
-<file path=ppt/slides/slide6.xml><?xml version="1.0" encoding="utf-8"?>
-<p:sld xmlns:a="http://schemas.openxmlformats.org/drawingml/2006/main" xmlns:r="http://schemas.openxmlformats.org/officeDocument/2006/relationships" xmlns:p="http://schemas.openxmlformats.org/presentationml/2006/main">
-  <p:cSld>
-    <p:spTree>
-      <p:nvGrpSpPr>
-        <p:cNvPr id="1" name="">
-          <a:extLst>
-            <a:ext uri="{FF2B5EF4-FFF2-40B4-BE49-F238E27FC236}">
-              <a16:creationId xmlns:a16="http://schemas.microsoft.com/office/drawing/2014/main" id="{45A369BE-0015-145D-BC42-DD922DF660F4}"/>
-            </a:ext>
-          </a:extLst>
-        </p:cNvPr>
-        <p:cNvGrpSpPr/>
-        <p:nvPr/>
-      </p:nvGrpSpPr>
-      <p:grpSpPr>
-        <a:xfrm>
-          <a:off x="0" y="0"/>
-          <a:ext cx="0" cy="0"/>
-          <a:chOff x="0" y="0"/>
-          <a:chExt cx="0" cy="0"/>
-        </a:xfrm>
-      </p:grpSpPr>
-      <p:sp>
-        <p:nvSpPr>
-          <p:cNvPr id="2" name="제목 1">
-            <a:extLst>
-              <a:ext uri="{FF2B5EF4-FFF2-40B4-BE49-F238E27FC236}">
-                <a16:creationId xmlns:a16="http://schemas.microsoft.com/office/drawing/2014/main" id="{2EA4ABAC-17A3-0E58-7AB3-5186BFD203BF}"/>
-              </a:ext>
-            </a:extLst>
-          </p:cNvPr>
-          <p:cNvSpPr>
-            <a:spLocks noGrp="1"/>
-          </p:cNvSpPr>
-          <p:nvPr>
-            <p:ph type="title"/>
-          </p:nvPr>
-        </p:nvSpPr>
-        <p:spPr/>
-        <p:txBody>
-          <a:bodyPr/>
-          <a:lstStyle/>
-          <a:p>
-            <a:r>
-              <a:rPr lang="en-US" altLang="ko-KR" dirty="0">
-                <a:solidFill>
-                  <a:srgbClr val="2F5597"/>
-                </a:solidFill>
-              </a:rPr>
-              <a:t>4.</a:t>
-            </a:r>
-            <a:r>
-              <a:rPr lang="ko-KR" altLang="en-US" dirty="0">
-                <a:solidFill>
-                  <a:srgbClr val="2F5597"/>
-                </a:solidFill>
-              </a:rPr>
-              <a:t> </a:t>
-            </a:r>
-            <a:r>
-              <a:rPr lang="en-US" altLang="ko-KR" dirty="0">
-                <a:solidFill>
-                  <a:srgbClr val="2F5597"/>
-                </a:solidFill>
-              </a:rPr>
-              <a:t>DSM</a:t>
-            </a:r>
-            <a:r>
-              <a:rPr lang="ko-KR" altLang="en-US" dirty="0">
-                <a:solidFill>
-                  <a:srgbClr val="2F5597"/>
-                </a:solidFill>
-              </a:rPr>
-              <a:t> 도식화</a:t>
-            </a:r>
-          </a:p>
-        </p:txBody>
-      </p:sp>
-    </p:spTree>
-    <p:extLst>
-      <p:ext uri="{BB962C8B-B14F-4D97-AF65-F5344CB8AC3E}">
-        <p14:creationId xmlns:p14="http://schemas.microsoft.com/office/powerpoint/2010/main" val="3715221785"/>
-      </p:ext>
-    </p:extLst>
-  </p:cSld>
-  <p:clrMapOvr>
-    <a:masterClrMapping/>
-  </p:clrMapOvr>
-  <mc:AlternateContent xmlns:mc="http://schemas.openxmlformats.org/markup-compatibility/2006" xmlns:p14="http://schemas.microsoft.com/office/powerpoint/2010/main">
-    <mc:Choice Requires="p14">
-      <p:transition spd="slow" p14:dur="2000" advTm="116713"/>
-    </mc:Choice>
-    <mc:Fallback xmlns="">
-      <p:transition spd="slow" advTm="116713"/>
-    </mc:Fallback>
-  </mc:AlternateContent>
-</p:sld>
-</file>
-
 <file path=ppt/theme/theme1.xml><?xml version="1.0" encoding="utf-8"?>
 <a:theme xmlns:a="http://schemas.openxmlformats.org/drawingml/2006/main" name="Office 테마">
   <a:themeElements>

--- a/assets/files/26.04.06.세미나.pptx
+++ b/assets/files/26.04.06.세미나.pptx
@@ -5,14 +5,15 @@
     <p:sldMasterId id="2147483648" r:id="rId1"/>
   </p:sldMasterIdLst>
   <p:notesMasterIdLst>
-    <p:notesMasterId r:id="rId7"/>
+    <p:notesMasterId r:id="rId8"/>
   </p:notesMasterIdLst>
   <p:sldIdLst>
     <p:sldId id="579" r:id="rId2"/>
-    <p:sldId id="628" r:id="rId3"/>
-    <p:sldId id="631" r:id="rId4"/>
-    <p:sldId id="629" r:id="rId5"/>
-    <p:sldId id="632" r:id="rId6"/>
+    <p:sldId id="634" r:id="rId3"/>
+    <p:sldId id="628" r:id="rId4"/>
+    <p:sldId id="631" r:id="rId5"/>
+    <p:sldId id="629" r:id="rId6"/>
+    <p:sldId id="632" r:id="rId7"/>
   </p:sldIdLst>
   <p:sldSz cx="12192000" cy="6858000"/>
   <p:notesSz cx="7099300" cy="10234613"/>
@@ -250,10 +251,18 @@
       <p15:sldGuideLst xmlns:p15="http://schemas.microsoft.com/office/powerpoint/2012/main"/>
     </p:ext>
     <p:ext uri="http://customooxmlschemas.google.com/">
-      <go:slidesCustomData xmlns:go="http://customooxmlschemas.google.com/" xmlns:ahyp="http://schemas.microsoft.com/office/drawing/2018/hyperlinkcolor" xmlns:p15="http://schemas.microsoft.com/office/powerpoint/2012/main" xmlns:p14="http://schemas.microsoft.com/office/powerpoint/2010/main" xmlns:com="http://schemas.openxmlformats.org/drawingml/2006/compatibility" xmlns:pvml="urn:schemas-microsoft-com:office:powerpoint" xmlns:v="urn:schemas-microsoft-com:vml" xmlns:o="urn:schemas-microsoft-com:office:office" xmlns:dgm="http://schemas.openxmlformats.org/drawingml/2006/diagram" xmlns:c="http://schemas.openxmlformats.org/drawingml/2006/chart" xmlns:mv="urn:schemas-microsoft-com:mac:vml" xmlns:mc="http://schemas.openxmlformats.org/markup-compatibility/2006" xmlns="" r:id="rId119" roundtripDataSignature="AMtx7mi60wwQBXdufn43yw7rgc2Btalb6Q=="/>
+      <go:slidesCustomData xmlns="" xmlns:mc="http://schemas.openxmlformats.org/markup-compatibility/2006" xmlns:mv="urn:schemas-microsoft-com:mac:vml" xmlns:c="http://schemas.openxmlformats.org/drawingml/2006/chart" xmlns:dgm="http://schemas.openxmlformats.org/drawingml/2006/diagram" xmlns:o="urn:schemas-microsoft-com:office:office" xmlns:v="urn:schemas-microsoft-com:vml" xmlns:pvml="urn:schemas-microsoft-com:office:powerpoint" xmlns:com="http://schemas.openxmlformats.org/drawingml/2006/compatibility" xmlns:p14="http://schemas.microsoft.com/office/powerpoint/2010/main" xmlns:p15="http://schemas.microsoft.com/office/powerpoint/2012/main" xmlns:ahyp="http://schemas.microsoft.com/office/drawing/2018/hyperlinkcolor" xmlns:go="http://customooxmlschemas.google.com/" r:id="rId119" roundtripDataSignature="AMtx7mi60wwQBXdufn43yw7rgc2Btalb6Q=="/>
     </p:ext>
   </p:extLst>
 </p:presentation>
+</file>
+
+<file path=ppt/revisionInfo.xml><?xml version="1.0" encoding="utf-8"?>
+<p1510:revInfo xmlns:a="http://schemas.openxmlformats.org/drawingml/2006/main" xmlns:r="http://schemas.openxmlformats.org/officeDocument/2006/relationships" xmlns:p1510="http://schemas.microsoft.com/office/powerpoint/2015/10/main">
+  <p1510:revLst>
+    <p1510:client id="{E91D7761-C735-4C91-8AA8-29D376163019}" v="1" dt="2026-05-19T17:38:43.376"/>
+  </p1510:revLst>
+</p1510:revInfo>
 </file>
 
 <file path=ppt/changesInfos/changesInfo1.xml><?xml version="1.0" encoding="utf-8"?>
@@ -261,16 +270,24 @@
   <pc:docChgLst>
     <pc:chgData name="성우 최" userId="b39b9c6800b01a47" providerId="LiveId" clId="{86918D44-C542-442D-8291-F46EC03904AF}"/>
     <pc:docChg chg="undo custSel addSld delSld modSld">
-      <pc:chgData name="성우 최" userId="b39b9c6800b01a47" providerId="LiveId" clId="{86918D44-C542-442D-8291-F46EC03904AF}" dt="2026-05-16T15:49:00.960" v="823" actId="47"/>
+      <pc:chgData name="성우 최" userId="b39b9c6800b01a47" providerId="LiveId" clId="{86918D44-C542-442D-8291-F46EC03904AF}" dt="2026-05-19T17:39:08.113" v="867" actId="20577"/>
       <pc:docMkLst>
         <pc:docMk/>
       </pc:docMkLst>
-      <pc:sldChg chg="delSp modSp del mod">
-        <pc:chgData name="성우 최" userId="b39b9c6800b01a47" providerId="LiveId" clId="{86918D44-C542-442D-8291-F46EC03904AF}" dt="2026-05-16T15:49:00.960" v="823" actId="47"/>
+      <pc:sldChg chg="modSp add mod">
+        <pc:chgData name="성우 최" userId="b39b9c6800b01a47" providerId="LiveId" clId="{86918D44-C542-442D-8291-F46EC03904AF}" dt="2026-05-19T17:39:08.113" v="867" actId="20577"/>
         <pc:sldMkLst>
           <pc:docMk/>
-          <pc:sldMk cId="3715221785" sldId="630"/>
+          <pc:sldMk cId="846647448" sldId="634"/>
         </pc:sldMkLst>
+        <pc:spChg chg="mod">
+          <ac:chgData name="성우 최" userId="b39b9c6800b01a47" providerId="LiveId" clId="{86918D44-C542-442D-8291-F46EC03904AF}" dt="2026-05-19T17:39:08.113" v="867" actId="20577"/>
+          <ac:spMkLst>
+            <pc:docMk/>
+            <pc:sldMk cId="846647448" sldId="634"/>
+            <ac:spMk id="6" creationId="{EBE37C29-BE2D-02B2-CB82-F09AB08495B9}"/>
+          </ac:spMkLst>
+        </pc:spChg>
       </pc:sldChg>
     </pc:docChg>
   </pc:docChgLst>
@@ -1599,6 +1616,127 @@
         <p:cNvPr id="1" name="">
           <a:extLst>
             <a:ext uri="{FF2B5EF4-FFF2-40B4-BE49-F238E27FC236}">
+              <a16:creationId xmlns:a16="http://schemas.microsoft.com/office/drawing/2014/main" id="{98C7338D-3299-39E6-9DDD-0F8F5CAA4597}"/>
+            </a:ext>
+          </a:extLst>
+        </p:cNvPr>
+        <p:cNvGrpSpPr/>
+        <p:nvPr/>
+      </p:nvGrpSpPr>
+      <p:grpSpPr>
+        <a:xfrm>
+          <a:off x="0" y="0"/>
+          <a:ext cx="0" cy="0"/>
+          <a:chOff x="0" y="0"/>
+          <a:chExt cx="0" cy="0"/>
+        </a:xfrm>
+      </p:grpSpPr>
+      <p:sp>
+        <p:nvSpPr>
+          <p:cNvPr id="2" name="슬라이드 이미지 개체 틀 1">
+            <a:extLst>
+              <a:ext uri="{FF2B5EF4-FFF2-40B4-BE49-F238E27FC236}">
+                <a16:creationId xmlns:a16="http://schemas.microsoft.com/office/drawing/2014/main" id="{83CCE7E3-1CDD-E2A0-D0E7-409D3F037D0C}"/>
+              </a:ext>
+            </a:extLst>
+          </p:cNvPr>
+          <p:cNvSpPr>
+            <a:spLocks noGrp="1" noRot="1" noChangeAspect="1"/>
+          </p:cNvSpPr>
+          <p:nvPr>
+            <p:ph type="sldImg"/>
+          </p:nvPr>
+        </p:nvSpPr>
+        <p:spPr/>
+      </p:sp>
+      <p:sp>
+        <p:nvSpPr>
+          <p:cNvPr id="3" name="슬라이드 노트 개체 틀 2">
+            <a:extLst>
+              <a:ext uri="{FF2B5EF4-FFF2-40B4-BE49-F238E27FC236}">
+                <a16:creationId xmlns:a16="http://schemas.microsoft.com/office/drawing/2014/main" id="{5304776C-4756-512F-D150-2D83CF21FC4F}"/>
+              </a:ext>
+            </a:extLst>
+          </p:cNvPr>
+          <p:cNvSpPr>
+            <a:spLocks noGrp="1"/>
+          </p:cNvSpPr>
+          <p:nvPr>
+            <p:ph type="body" idx="1"/>
+          </p:nvPr>
+        </p:nvSpPr>
+        <p:spPr/>
+        <p:txBody>
+          <a:bodyPr/>
+          <a:lstStyle/>
+          <a:p>
+            <a:pPr algn="just" latinLnBrk="1">
+              <a:lnSpc>
+                <a:spcPct val="107000"/>
+              </a:lnSpc>
+              <a:spcAft>
+                <a:spcPts val="800"/>
+              </a:spcAft>
+            </a:pPr>
+            <a:endParaRPr lang="en-US" altLang="ko-KR" sz="1600" b="1" kern="100" dirty="0">
+              <a:effectLst/>
+              <a:latin typeface="맑은 고딕" panose="020B0503020000020004" pitchFamily="50" charset="-127"/>
+              <a:ea typeface="맑은 고딕" panose="020B0503020000020004" pitchFamily="50" charset="-127"/>
+              <a:cs typeface="Times New Roman" panose="02020603050405020304" pitchFamily="18" charset="0"/>
+            </a:endParaRPr>
+          </a:p>
+        </p:txBody>
+      </p:sp>
+      <p:sp>
+        <p:nvSpPr>
+          <p:cNvPr id="4" name="슬라이드 번호 개체 틀 3">
+            <a:extLst>
+              <a:ext uri="{FF2B5EF4-FFF2-40B4-BE49-F238E27FC236}">
+                <a16:creationId xmlns:a16="http://schemas.microsoft.com/office/drawing/2014/main" id="{C5C51FC7-52F1-D61B-DB8B-9BC6E4943FFB}"/>
+              </a:ext>
+            </a:extLst>
+          </p:cNvPr>
+          <p:cNvSpPr>
+            <a:spLocks noGrp="1"/>
+          </p:cNvSpPr>
+          <p:nvPr>
+            <p:ph type="sldNum" sz="quarter" idx="5"/>
+          </p:nvPr>
+        </p:nvSpPr>
+        <p:spPr/>
+        <p:txBody>
+          <a:bodyPr/>
+          <a:lstStyle/>
+          <a:p>
+            <a:fld id="{D0C664DC-C26E-465D-99FF-B6F4031E277D}" type="slidenum">
+              <a:rPr lang="ko-KR" altLang="en-US" smtClean="0"/>
+              <a:t>3</a:t>
+            </a:fld>
+            <a:endParaRPr lang="ko-KR" altLang="en-US"/>
+          </a:p>
+        </p:txBody>
+      </p:sp>
+    </p:spTree>
+    <p:extLst>
+      <p:ext uri="{BB962C8B-B14F-4D97-AF65-F5344CB8AC3E}">
+        <p14:creationId xmlns:p14="http://schemas.microsoft.com/office/powerpoint/2010/main" val="606751372"/>
+      </p:ext>
+    </p:extLst>
+  </p:cSld>
+  <p:clrMapOvr>
+    <a:masterClrMapping/>
+  </p:clrMapOvr>
+</p:notes>
+</file>
+
+<file path=ppt/notesSlides/notesSlide3.xml><?xml version="1.0" encoding="utf-8"?>
+<p:notes xmlns:a="http://schemas.openxmlformats.org/drawingml/2006/main" xmlns:r="http://schemas.openxmlformats.org/officeDocument/2006/relationships" xmlns:p="http://schemas.openxmlformats.org/presentationml/2006/main">
+  <p:cSld>
+    <p:spTree>
+      <p:nvGrpSpPr>
+        <p:cNvPr id="1" name="">
+          <a:extLst>
+            <a:ext uri="{FF2B5EF4-FFF2-40B4-BE49-F238E27FC236}">
               <a16:creationId xmlns:a16="http://schemas.microsoft.com/office/drawing/2014/main" id="{7C3C28A8-D27A-C779-215E-39889C5DB568}"/>
             </a:ext>
           </a:extLst>
@@ -1693,7 +1831,7 @@
           <a:p>
             <a:fld id="{D0C664DC-C26E-465D-99FF-B6F4031E277D}" type="slidenum">
               <a:rPr lang="ko-KR" altLang="en-US" smtClean="0"/>
-              <a:t>3</a:t>
+              <a:t>4</a:t>
             </a:fld>
             <a:endParaRPr lang="ko-KR" altLang="en-US"/>
           </a:p>
@@ -1712,7 +1850,7 @@
 </p:notes>
 </file>
 
-<file path=ppt/notesSlides/notesSlide3.xml><?xml version="1.0" encoding="utf-8"?>
+<file path=ppt/notesSlides/notesSlide4.xml><?xml version="1.0" encoding="utf-8"?>
 <p:notes xmlns:a="http://schemas.openxmlformats.org/drawingml/2006/main" xmlns:r="http://schemas.openxmlformats.org/officeDocument/2006/relationships" xmlns:p="http://schemas.openxmlformats.org/presentationml/2006/main">
   <p:cSld>
     <p:spTree>
@@ -1814,7 +1952,7 @@
           <a:p>
             <a:fld id="{D0C664DC-C26E-465D-99FF-B6F4031E277D}" type="slidenum">
               <a:rPr lang="ko-KR" altLang="en-US" smtClean="0"/>
-              <a:t>4</a:t>
+              <a:t>5</a:t>
             </a:fld>
             <a:endParaRPr lang="ko-KR" altLang="en-US"/>
           </a:p>
@@ -1833,7 +1971,7 @@
 </p:notes>
 </file>
 
-<file path=ppt/notesSlides/notesSlide4.xml><?xml version="1.0" encoding="utf-8"?>
+<file path=ppt/notesSlides/notesSlide5.xml><?xml version="1.0" encoding="utf-8"?>
 <p:notes xmlns:a="http://schemas.openxmlformats.org/drawingml/2006/main" xmlns:r="http://schemas.openxmlformats.org/officeDocument/2006/relationships" xmlns:p="http://schemas.openxmlformats.org/presentationml/2006/main">
   <p:cSld>
     <p:spTree>
@@ -1935,7 +2073,7 @@
           <a:p>
             <a:fld id="{D0C664DC-C26E-465D-99FF-B6F4031E277D}" type="slidenum">
               <a:rPr lang="ko-KR" altLang="en-US" smtClean="0"/>
-              <a:t>5</a:t>
+              <a:t>6</a:t>
             </a:fld>
             <a:endParaRPr lang="ko-KR" altLang="en-US"/>
           </a:p>
@@ -10634,6 +10772,447 @@
                   <a:srgbClr val="2F5597"/>
                 </a:solidFill>
               </a:rPr>
+              <a:t>Overview</a:t>
+            </a:r>
+            <a:endParaRPr lang="ko-KR" altLang="en-US" dirty="0">
+              <a:solidFill>
+                <a:srgbClr val="2F5597"/>
+              </a:solidFill>
+            </a:endParaRPr>
+          </a:p>
+        </p:txBody>
+      </p:sp>
+      <p:sp>
+        <p:nvSpPr>
+          <p:cNvPr id="6" name="내용 개체 틀 2">
+            <a:extLst>
+              <a:ext uri="{FF2B5EF4-FFF2-40B4-BE49-F238E27FC236}">
+                <a16:creationId xmlns:a16="http://schemas.microsoft.com/office/drawing/2014/main" id="{EBE37C29-BE2D-02B2-CB82-F09AB08495B9}"/>
+              </a:ext>
+            </a:extLst>
+          </p:cNvPr>
+          <p:cNvSpPr txBox="1">
+            <a:spLocks/>
+          </p:cNvSpPr>
+          <p:nvPr/>
+        </p:nvSpPr>
+        <p:spPr>
+          <a:xfrm>
+            <a:off x="350651" y="907258"/>
+            <a:ext cx="11554596" cy="2846595"/>
+          </a:xfrm>
+          <a:prstGeom prst="rect">
+            <a:avLst/>
+          </a:prstGeom>
+          <a:noFill/>
+          <a:ln>
+            <a:noFill/>
+          </a:ln>
+        </p:spPr>
+        <p:txBody>
+          <a:bodyPr spcFirstLastPara="1" wrap="square" lIns="91425" tIns="45700" rIns="91425" bIns="45700" anchor="t" anchorCtr="0">
+            <a:normAutofit/>
+          </a:bodyPr>
+          <a:lstStyle>
+            <a:defPPr marR="0" lvl="0" algn="l" rtl="0">
+              <a:lnSpc>
+                <a:spcPct val="100000"/>
+              </a:lnSpc>
+              <a:spcBef>
+                <a:spcPts val="0"/>
+              </a:spcBef>
+              <a:spcAft>
+                <a:spcPts val="0"/>
+              </a:spcAft>
+            </a:defPPr>
+            <a:lvl1pPr marL="457200" marR="0" lvl="0" indent="-355600" algn="l" rtl="0">
+              <a:lnSpc>
+                <a:spcPct val="90000"/>
+              </a:lnSpc>
+              <a:spcBef>
+                <a:spcPts val="1000"/>
+              </a:spcBef>
+              <a:spcAft>
+                <a:spcPts val="0"/>
+              </a:spcAft>
+              <a:buClr>
+                <a:schemeClr val="dk1"/>
+              </a:buClr>
+              <a:buSzPts val="2000"/>
+              <a:buFont typeface="Noto Sans Symbols"/>
+              <a:buChar char="▪"/>
+              <a:defRPr sz="2000" b="1" i="0" u="none" strike="noStrike" cap="none">
+                <a:solidFill>
+                  <a:schemeClr val="dk1"/>
+                </a:solidFill>
+                <a:latin typeface="Calibri"/>
+                <a:ea typeface="Calibri"/>
+                <a:cs typeface="Calibri"/>
+                <a:sym typeface="Calibri"/>
+              </a:defRPr>
+            </a:lvl1pPr>
+            <a:lvl2pPr marL="914400" marR="0" lvl="1" indent="-342900" algn="l" rtl="0">
+              <a:lnSpc>
+                <a:spcPct val="90000"/>
+              </a:lnSpc>
+              <a:spcBef>
+                <a:spcPts val="500"/>
+              </a:spcBef>
+              <a:spcAft>
+                <a:spcPts val="0"/>
+              </a:spcAft>
+              <a:buClr>
+                <a:schemeClr val="dk1"/>
+              </a:buClr>
+              <a:buSzPts val="1800"/>
+              <a:buFont typeface="Arial"/>
+              <a:buChar char="•"/>
+              <a:defRPr sz="1800" b="0" i="0" u="none" strike="noStrike" cap="none">
+                <a:solidFill>
+                  <a:schemeClr val="dk1"/>
+                </a:solidFill>
+                <a:latin typeface="Calibri"/>
+                <a:ea typeface="Calibri"/>
+                <a:cs typeface="Calibri"/>
+                <a:sym typeface="Calibri"/>
+              </a:defRPr>
+            </a:lvl2pPr>
+            <a:lvl3pPr marL="1371600" marR="0" lvl="2" indent="-330200" algn="l" rtl="0">
+              <a:lnSpc>
+                <a:spcPct val="90000"/>
+              </a:lnSpc>
+              <a:spcBef>
+                <a:spcPts val="500"/>
+              </a:spcBef>
+              <a:spcAft>
+                <a:spcPts val="0"/>
+              </a:spcAft>
+              <a:buClr>
+                <a:schemeClr val="dk1"/>
+              </a:buClr>
+              <a:buSzPts val="1600"/>
+              <a:buFont typeface="Noto Sans Symbols"/>
+              <a:buChar char="✔"/>
+              <a:defRPr sz="1600" b="0" i="0" u="none" strike="noStrike" cap="none">
+                <a:solidFill>
+                  <a:schemeClr val="dk1"/>
+                </a:solidFill>
+                <a:latin typeface="Calibri"/>
+                <a:ea typeface="Calibri"/>
+                <a:cs typeface="Calibri"/>
+                <a:sym typeface="Calibri"/>
+              </a:defRPr>
+            </a:lvl3pPr>
+            <a:lvl4pPr marL="1828800" marR="0" lvl="3" indent="-317500" algn="l" rtl="0">
+              <a:lnSpc>
+                <a:spcPct val="90000"/>
+              </a:lnSpc>
+              <a:spcBef>
+                <a:spcPts val="500"/>
+              </a:spcBef>
+              <a:spcAft>
+                <a:spcPts val="0"/>
+              </a:spcAft>
+              <a:buClr>
+                <a:schemeClr val="dk1"/>
+              </a:buClr>
+              <a:buSzPts val="1400"/>
+              <a:buFont typeface="Arial"/>
+              <a:buChar char="•"/>
+              <a:defRPr sz="1400" b="0" i="0" u="none" strike="noStrike" cap="none">
+                <a:solidFill>
+                  <a:schemeClr val="dk1"/>
+                </a:solidFill>
+                <a:latin typeface="Calibri"/>
+                <a:ea typeface="Calibri"/>
+                <a:cs typeface="Calibri"/>
+                <a:sym typeface="Calibri"/>
+              </a:defRPr>
+            </a:lvl4pPr>
+            <a:lvl5pPr marL="2286000" marR="0" lvl="4" indent="-342900" algn="l" rtl="0">
+              <a:lnSpc>
+                <a:spcPct val="90000"/>
+              </a:lnSpc>
+              <a:spcBef>
+                <a:spcPts val="500"/>
+              </a:spcBef>
+              <a:spcAft>
+                <a:spcPts val="0"/>
+              </a:spcAft>
+              <a:buClr>
+                <a:schemeClr val="dk1"/>
+              </a:buClr>
+              <a:buSzPts val="1800"/>
+              <a:buFont typeface="Arial"/>
+              <a:buChar char="•"/>
+              <a:defRPr sz="1800" b="0" i="0" u="none" strike="noStrike" cap="none">
+                <a:solidFill>
+                  <a:schemeClr val="dk1"/>
+                </a:solidFill>
+                <a:latin typeface="Calibri"/>
+                <a:ea typeface="Calibri"/>
+                <a:cs typeface="Calibri"/>
+                <a:sym typeface="Calibri"/>
+              </a:defRPr>
+            </a:lvl5pPr>
+            <a:lvl6pPr marL="2743200" marR="0" lvl="5" indent="-342900" algn="l" rtl="0">
+              <a:lnSpc>
+                <a:spcPct val="90000"/>
+              </a:lnSpc>
+              <a:spcBef>
+                <a:spcPts val="500"/>
+              </a:spcBef>
+              <a:spcAft>
+                <a:spcPts val="0"/>
+              </a:spcAft>
+              <a:buClr>
+                <a:schemeClr val="dk1"/>
+              </a:buClr>
+              <a:buSzPts val="1800"/>
+              <a:buFont typeface="Arial"/>
+              <a:buChar char="•"/>
+              <a:defRPr sz="1800" b="0" i="0" u="none" strike="noStrike" cap="none">
+                <a:solidFill>
+                  <a:schemeClr val="dk1"/>
+                </a:solidFill>
+                <a:latin typeface="Malgun Gothic"/>
+                <a:ea typeface="Malgun Gothic"/>
+                <a:cs typeface="Malgun Gothic"/>
+                <a:sym typeface="Malgun Gothic"/>
+              </a:defRPr>
+            </a:lvl6pPr>
+            <a:lvl7pPr marL="3200400" marR="0" lvl="6" indent="-342900" algn="l" rtl="0">
+              <a:lnSpc>
+                <a:spcPct val="90000"/>
+              </a:lnSpc>
+              <a:spcBef>
+                <a:spcPts val="500"/>
+              </a:spcBef>
+              <a:spcAft>
+                <a:spcPts val="0"/>
+              </a:spcAft>
+              <a:buClr>
+                <a:schemeClr val="dk1"/>
+              </a:buClr>
+              <a:buSzPts val="1800"/>
+              <a:buFont typeface="Arial"/>
+              <a:buChar char="•"/>
+              <a:defRPr sz="1800" b="0" i="0" u="none" strike="noStrike" cap="none">
+                <a:solidFill>
+                  <a:schemeClr val="dk1"/>
+                </a:solidFill>
+                <a:latin typeface="Malgun Gothic"/>
+                <a:ea typeface="Malgun Gothic"/>
+                <a:cs typeface="Malgun Gothic"/>
+                <a:sym typeface="Malgun Gothic"/>
+              </a:defRPr>
+            </a:lvl7pPr>
+            <a:lvl8pPr marL="3657600" marR="0" lvl="7" indent="-342900" algn="l" rtl="0">
+              <a:lnSpc>
+                <a:spcPct val="90000"/>
+              </a:lnSpc>
+              <a:spcBef>
+                <a:spcPts val="500"/>
+              </a:spcBef>
+              <a:spcAft>
+                <a:spcPts val="0"/>
+              </a:spcAft>
+              <a:buClr>
+                <a:schemeClr val="dk1"/>
+              </a:buClr>
+              <a:buSzPts val="1800"/>
+              <a:buFont typeface="Arial"/>
+              <a:buChar char="•"/>
+              <a:defRPr sz="1800" b="0" i="0" u="none" strike="noStrike" cap="none">
+                <a:solidFill>
+                  <a:schemeClr val="dk1"/>
+                </a:solidFill>
+                <a:latin typeface="Malgun Gothic"/>
+                <a:ea typeface="Malgun Gothic"/>
+                <a:cs typeface="Malgun Gothic"/>
+                <a:sym typeface="Malgun Gothic"/>
+              </a:defRPr>
+            </a:lvl8pPr>
+            <a:lvl9pPr marL="4114800" marR="0" lvl="8" indent="-342900" algn="l" rtl="0">
+              <a:lnSpc>
+                <a:spcPct val="90000"/>
+              </a:lnSpc>
+              <a:spcBef>
+                <a:spcPts val="500"/>
+              </a:spcBef>
+              <a:spcAft>
+                <a:spcPts val="0"/>
+              </a:spcAft>
+              <a:buClr>
+                <a:schemeClr val="dk1"/>
+              </a:buClr>
+              <a:buSzPts val="1800"/>
+              <a:buFont typeface="Arial"/>
+              <a:buChar char="•"/>
+              <a:defRPr sz="1800" b="0" i="0" u="none" strike="noStrike" cap="none">
+                <a:solidFill>
+                  <a:schemeClr val="dk1"/>
+                </a:solidFill>
+                <a:latin typeface="Malgun Gothic"/>
+                <a:ea typeface="Malgun Gothic"/>
+                <a:cs typeface="Malgun Gothic"/>
+                <a:sym typeface="Malgun Gothic"/>
+              </a:defRPr>
+            </a:lvl9pPr>
+          </a:lstStyle>
+          <a:p>
+            <a:pPr>
+              <a:lnSpc>
+                <a:spcPct val="150000"/>
+              </a:lnSpc>
+              <a:defRPr/>
+            </a:pPr>
+            <a:r>
+              <a:rPr lang="en-US" altLang="ko-KR" sz="1800" dirty="0">
+                <a:solidFill>
+                  <a:schemeClr val="tx1"/>
+                </a:solidFill>
+                <a:latin typeface="Calibri" panose="020F0502020204030204" pitchFamily="34" charset="0"/>
+                <a:cs typeface="Calibri" panose="020F0502020204030204" pitchFamily="34" charset="0"/>
+              </a:rPr>
+              <a:t>BBS </a:t>
+            </a:r>
+            <a:r>
+              <a:rPr lang="ko-KR" altLang="en-US" sz="1800" dirty="0">
+                <a:solidFill>
+                  <a:schemeClr val="tx1"/>
+                </a:solidFill>
+                <a:latin typeface="Calibri" panose="020F0502020204030204" pitchFamily="34" charset="0"/>
+                <a:cs typeface="Calibri" panose="020F0502020204030204" pitchFamily="34" charset="0"/>
+              </a:rPr>
+              <a:t>도식화 그림 업데이트하기</a:t>
+            </a:r>
+            <a:endParaRPr lang="en-US" altLang="ko-KR" sz="1800" dirty="0">
+              <a:solidFill>
+                <a:schemeClr val="tx1"/>
+              </a:solidFill>
+              <a:latin typeface="Calibri" panose="020F0502020204030204" pitchFamily="34" charset="0"/>
+              <a:cs typeface="Calibri" panose="020F0502020204030204" pitchFamily="34" charset="0"/>
+            </a:endParaRPr>
+          </a:p>
+          <a:p>
+            <a:pPr>
+              <a:lnSpc>
+                <a:spcPct val="150000"/>
+              </a:lnSpc>
+              <a:defRPr/>
+            </a:pPr>
+            <a:r>
+              <a:rPr lang="en-US" altLang="ko-KR" sz="1800" dirty="0">
+                <a:solidFill>
+                  <a:schemeClr val="tx1"/>
+                </a:solidFill>
+                <a:latin typeface="Calibri" panose="020F0502020204030204" pitchFamily="34" charset="0"/>
+                <a:cs typeface="Calibri" panose="020F0502020204030204" pitchFamily="34" charset="0"/>
+              </a:rPr>
+              <a:t>SBR </a:t>
+            </a:r>
+            <a:r>
+              <a:rPr lang="ko-KR" altLang="en-US" sz="1800" dirty="0">
+                <a:solidFill>
+                  <a:schemeClr val="tx1"/>
+                </a:solidFill>
+                <a:latin typeface="Calibri" panose="020F0502020204030204" pitchFamily="34" charset="0"/>
+                <a:cs typeface="Calibri" panose="020F0502020204030204" pitchFamily="34" charset="0"/>
+              </a:rPr>
+              <a:t>비트 </a:t>
+            </a:r>
+            <a:r>
+              <a:rPr lang="ko-KR" altLang="en-US" sz="1800">
+                <a:solidFill>
+                  <a:schemeClr val="tx1"/>
+                </a:solidFill>
+                <a:latin typeface="Calibri" panose="020F0502020204030204" pitchFamily="34" charset="0"/>
+                <a:cs typeface="Calibri" panose="020F0502020204030204" pitchFamily="34" charset="0"/>
+              </a:rPr>
+              <a:t>슬라이스 도식화하기</a:t>
+            </a:r>
+            <a:endParaRPr lang="en-US" altLang="ko-KR" sz="1800" dirty="0">
+              <a:solidFill>
+                <a:schemeClr val="tx1"/>
+              </a:solidFill>
+              <a:latin typeface="Calibri" panose="020F0502020204030204" pitchFamily="34" charset="0"/>
+              <a:cs typeface="Calibri" panose="020F0502020204030204" pitchFamily="34" charset="0"/>
+            </a:endParaRPr>
+          </a:p>
+        </p:txBody>
+      </p:sp>
+    </p:spTree>
+    <p:extLst>
+      <p:ext uri="{BB962C8B-B14F-4D97-AF65-F5344CB8AC3E}">
+        <p14:creationId xmlns:p14="http://schemas.microsoft.com/office/powerpoint/2010/main" val="846647448"/>
+      </p:ext>
+    </p:extLst>
+  </p:cSld>
+  <p:clrMapOvr>
+    <a:masterClrMapping/>
+  </p:clrMapOvr>
+  <mc:AlternateContent xmlns:mc="http://schemas.openxmlformats.org/markup-compatibility/2006" xmlns:p14="http://schemas.microsoft.com/office/powerpoint/2010/main">
+    <mc:Choice Requires="p14">
+      <p:transition spd="slow" p14:dur="2000" advTm="116713"/>
+    </mc:Choice>
+    <mc:Fallback xmlns="">
+      <p:transition spd="slow" advTm="116713"/>
+    </mc:Fallback>
+  </mc:AlternateContent>
+</p:sld>
+</file>
+
+<file path=ppt/slides/slide3.xml><?xml version="1.0" encoding="utf-8"?>
+<p:sld xmlns:a="http://schemas.openxmlformats.org/drawingml/2006/main" xmlns:r="http://schemas.openxmlformats.org/officeDocument/2006/relationships" xmlns:p="http://schemas.openxmlformats.org/presentationml/2006/main">
+  <p:cSld>
+    <p:spTree>
+      <p:nvGrpSpPr>
+        <p:cNvPr id="1" name="">
+          <a:extLst>
+            <a:ext uri="{FF2B5EF4-FFF2-40B4-BE49-F238E27FC236}">
+              <a16:creationId xmlns:a16="http://schemas.microsoft.com/office/drawing/2014/main" id="{DB837B88-AC5B-BB36-C643-F1B6F925D444}"/>
+            </a:ext>
+          </a:extLst>
+        </p:cNvPr>
+        <p:cNvGrpSpPr/>
+        <p:nvPr/>
+      </p:nvGrpSpPr>
+      <p:grpSpPr>
+        <a:xfrm>
+          <a:off x="0" y="0"/>
+          <a:ext cx="0" cy="0"/>
+          <a:chOff x="0" y="0"/>
+          <a:chExt cx="0" cy="0"/>
+        </a:xfrm>
+      </p:grpSpPr>
+      <p:sp>
+        <p:nvSpPr>
+          <p:cNvPr id="2" name="제목 1">
+            <a:extLst>
+              <a:ext uri="{FF2B5EF4-FFF2-40B4-BE49-F238E27FC236}">
+                <a16:creationId xmlns:a16="http://schemas.microsoft.com/office/drawing/2014/main" id="{AF4FF169-BD3A-7F72-BA8E-9DF65D87F001}"/>
+              </a:ext>
+            </a:extLst>
+          </p:cNvPr>
+          <p:cNvSpPr>
+            <a:spLocks noGrp="1"/>
+          </p:cNvSpPr>
+          <p:nvPr>
+            <p:ph type="title"/>
+          </p:nvPr>
+        </p:nvSpPr>
+        <p:spPr/>
+        <p:txBody>
+          <a:bodyPr/>
+          <a:lstStyle/>
+          <a:p>
+            <a:r>
+              <a:rPr lang="en-US" altLang="ko-KR" dirty="0">
+                <a:solidFill>
+                  <a:srgbClr val="2F5597"/>
+                </a:solidFill>
+              </a:rPr>
               <a:t>1.</a:t>
             </a:r>
             <a:r>
@@ -24163,7 +24742,7 @@
 </p:sld>
 </file>
 
-<file path=ppt/slides/slide3.xml><?xml version="1.0" encoding="utf-8"?>
+<file path=ppt/slides/slide4.xml><?xml version="1.0" encoding="utf-8"?>
 <p:sld xmlns:a="http://schemas.openxmlformats.org/drawingml/2006/main" xmlns:r="http://schemas.openxmlformats.org/officeDocument/2006/relationships" xmlns:p="http://schemas.openxmlformats.org/presentationml/2006/main">
   <p:cSld>
     <p:spTree>
@@ -37955,7 +38534,7 @@
 </p:sld>
 </file>
 
-<file path=ppt/slides/slide4.xml><?xml version="1.0" encoding="utf-8"?>
+<file path=ppt/slides/slide5.xml><?xml version="1.0" encoding="utf-8"?>
 <p:sld xmlns:a="http://schemas.openxmlformats.org/drawingml/2006/main" xmlns:r="http://schemas.openxmlformats.org/officeDocument/2006/relationships" xmlns:p="http://schemas.openxmlformats.org/presentationml/2006/main">
   <p:cSld>
     <p:spTree>
@@ -39231,7 +39810,7 @@
 </p:sld>
 </file>
 
-<file path=ppt/slides/slide5.xml><?xml version="1.0" encoding="utf-8"?>
+<file path=ppt/slides/slide6.xml><?xml version="1.0" encoding="utf-8"?>
 <p:sld xmlns:a="http://schemas.openxmlformats.org/drawingml/2006/main" xmlns:r="http://schemas.openxmlformats.org/officeDocument/2006/relationships" xmlns:p="http://schemas.openxmlformats.org/presentationml/2006/main">
   <p:cSld>
     <p:spTree>
